--- a/這是天父世界_v3.pptx
+++ b/這是天父世界_v3.pptx
@@ -8,16 +8,17 @@
     <p:sldId id="257" r:id="rId2"/>
     <p:sldId id="258" r:id="rId3"/>
     <p:sldId id="259" r:id="rId4"/>
-    <p:sldId id="260" r:id="rId5"/>
-    <p:sldId id="261" r:id="rId6"/>
-    <p:sldId id="262" r:id="rId7"/>
-    <p:sldId id="263" r:id="rId8"/>
-    <p:sldId id="264" r:id="rId9"/>
-    <p:sldId id="265" r:id="rId10"/>
-    <p:sldId id="266" r:id="rId11"/>
-    <p:sldId id="267" r:id="rId12"/>
-    <p:sldId id="268" r:id="rId13"/>
-    <p:sldId id="269" r:id="rId14"/>
+    <p:sldId id="270" r:id="rId5"/>
+    <p:sldId id="260" r:id="rId6"/>
+    <p:sldId id="261" r:id="rId7"/>
+    <p:sldId id="262" r:id="rId8"/>
+    <p:sldId id="263" r:id="rId9"/>
+    <p:sldId id="264" r:id="rId10"/>
+    <p:sldId id="265" r:id="rId11"/>
+    <p:sldId id="266" r:id="rId12"/>
+    <p:sldId id="267" r:id="rId13"/>
+    <p:sldId id="268" r:id="rId14"/>
+    <p:sldId id="269" r:id="rId15"/>
   </p:sldIdLst>
   <p:sldSz cx="12192000" cy="6858000"/>
   <p:notesSz cx="6858000" cy="9144000"/>
@@ -300,7 +301,8 @@
           <a:p>
             <a:fld id="{D2001C5A-C74B-4930-AC12-C09894D28342}" type="datetimeFigureOut">
               <a:rPr lang="en-US" smtClean="0"/>
-              <a:t>8/5/2023</a:t>
+              <a:pPr/>
+              <a:t>1/9/2024</a:t>
             </a:fld>
             <a:endParaRPr lang="en-US"/>
           </a:p>
@@ -342,6 +344,7 @@
           <a:p>
             <a:fld id="{5D0D9164-2450-428D-A77F-ECD64A434696}" type="slidenum">
               <a:rPr lang="en-US" smtClean="0"/>
+              <a:pPr/>
               <a:t>‹#›</a:t>
             </a:fld>
             <a:endParaRPr lang="en-US"/>
@@ -351,7 +354,7 @@
     </p:spTree>
     <p:extLst>
       <p:ext uri="{BB962C8B-B14F-4D97-AF65-F5344CB8AC3E}">
-        <p14:creationId xmlns:p14="http://schemas.microsoft.com/office/powerpoint/2010/main" val="4192649881"/>
+        <p14:creationId xmlns:p14="http://schemas.microsoft.com/office/powerpoint/2010/main" xmlns="" val="4192649881"/>
       </p:ext>
     </p:extLst>
   </p:cSld>
@@ -470,7 +473,8 @@
           <a:p>
             <a:fld id="{D2001C5A-C74B-4930-AC12-C09894D28342}" type="datetimeFigureOut">
               <a:rPr lang="en-US" smtClean="0"/>
-              <a:t>8/5/2023</a:t>
+              <a:pPr/>
+              <a:t>1/9/2024</a:t>
             </a:fld>
             <a:endParaRPr lang="en-US"/>
           </a:p>
@@ -512,6 +516,7 @@
           <a:p>
             <a:fld id="{5D0D9164-2450-428D-A77F-ECD64A434696}" type="slidenum">
               <a:rPr lang="en-US" smtClean="0"/>
+              <a:pPr/>
               <a:t>‹#›</a:t>
             </a:fld>
             <a:endParaRPr lang="en-US"/>
@@ -521,7 +526,7 @@
     </p:spTree>
     <p:extLst>
       <p:ext uri="{BB962C8B-B14F-4D97-AF65-F5344CB8AC3E}">
-        <p14:creationId xmlns:p14="http://schemas.microsoft.com/office/powerpoint/2010/main" val="3858748747"/>
+        <p14:creationId xmlns:p14="http://schemas.microsoft.com/office/powerpoint/2010/main" xmlns="" val="3858748747"/>
       </p:ext>
     </p:extLst>
   </p:cSld>
@@ -650,7 +655,8 @@
           <a:p>
             <a:fld id="{D2001C5A-C74B-4930-AC12-C09894D28342}" type="datetimeFigureOut">
               <a:rPr lang="en-US" smtClean="0"/>
-              <a:t>8/5/2023</a:t>
+              <a:pPr/>
+              <a:t>1/9/2024</a:t>
             </a:fld>
             <a:endParaRPr lang="en-US"/>
           </a:p>
@@ -692,6 +698,7 @@
           <a:p>
             <a:fld id="{5D0D9164-2450-428D-A77F-ECD64A434696}" type="slidenum">
               <a:rPr lang="en-US" smtClean="0"/>
+              <a:pPr/>
               <a:t>‹#›</a:t>
             </a:fld>
             <a:endParaRPr lang="en-US"/>
@@ -701,7 +708,7 @@
     </p:spTree>
     <p:extLst>
       <p:ext uri="{BB962C8B-B14F-4D97-AF65-F5344CB8AC3E}">
-        <p14:creationId xmlns:p14="http://schemas.microsoft.com/office/powerpoint/2010/main" val="4069476122"/>
+        <p14:creationId xmlns:p14="http://schemas.microsoft.com/office/powerpoint/2010/main" xmlns="" val="4069476122"/>
       </p:ext>
     </p:extLst>
   </p:cSld>
@@ -820,7 +827,8 @@
           <a:p>
             <a:fld id="{D2001C5A-C74B-4930-AC12-C09894D28342}" type="datetimeFigureOut">
               <a:rPr lang="en-US" smtClean="0"/>
-              <a:t>8/5/2023</a:t>
+              <a:pPr/>
+              <a:t>1/9/2024</a:t>
             </a:fld>
             <a:endParaRPr lang="en-US"/>
           </a:p>
@@ -862,6 +870,7 @@
           <a:p>
             <a:fld id="{5D0D9164-2450-428D-A77F-ECD64A434696}" type="slidenum">
               <a:rPr lang="en-US" smtClean="0"/>
+              <a:pPr/>
               <a:t>‹#›</a:t>
             </a:fld>
             <a:endParaRPr lang="en-US"/>
@@ -871,7 +880,7 @@
     </p:spTree>
     <p:extLst>
       <p:ext uri="{BB962C8B-B14F-4D97-AF65-F5344CB8AC3E}">
-        <p14:creationId xmlns:p14="http://schemas.microsoft.com/office/powerpoint/2010/main" val="2025119923"/>
+        <p14:creationId xmlns:p14="http://schemas.microsoft.com/office/powerpoint/2010/main" xmlns="" val="2025119923"/>
       </p:ext>
     </p:extLst>
   </p:cSld>
@@ -1066,7 +1075,8 @@
           <a:p>
             <a:fld id="{D2001C5A-C74B-4930-AC12-C09894D28342}" type="datetimeFigureOut">
               <a:rPr lang="en-US" smtClean="0"/>
-              <a:t>8/5/2023</a:t>
+              <a:pPr/>
+              <a:t>1/9/2024</a:t>
             </a:fld>
             <a:endParaRPr lang="en-US"/>
           </a:p>
@@ -1108,6 +1118,7 @@
           <a:p>
             <a:fld id="{5D0D9164-2450-428D-A77F-ECD64A434696}" type="slidenum">
               <a:rPr lang="en-US" smtClean="0"/>
+              <a:pPr/>
               <a:t>‹#›</a:t>
             </a:fld>
             <a:endParaRPr lang="en-US"/>
@@ -1117,7 +1128,7 @@
     </p:spTree>
     <p:extLst>
       <p:ext uri="{BB962C8B-B14F-4D97-AF65-F5344CB8AC3E}">
-        <p14:creationId xmlns:p14="http://schemas.microsoft.com/office/powerpoint/2010/main" val="3416422035"/>
+        <p14:creationId xmlns:p14="http://schemas.microsoft.com/office/powerpoint/2010/main" xmlns="" val="3416422035"/>
       </p:ext>
     </p:extLst>
   </p:cSld>
@@ -1354,7 +1365,8 @@
           <a:p>
             <a:fld id="{D2001C5A-C74B-4930-AC12-C09894D28342}" type="datetimeFigureOut">
               <a:rPr lang="en-US" smtClean="0"/>
-              <a:t>8/5/2023</a:t>
+              <a:pPr/>
+              <a:t>1/9/2024</a:t>
             </a:fld>
             <a:endParaRPr lang="en-US"/>
           </a:p>
@@ -1396,6 +1408,7 @@
           <a:p>
             <a:fld id="{5D0D9164-2450-428D-A77F-ECD64A434696}" type="slidenum">
               <a:rPr lang="en-US" smtClean="0"/>
+              <a:pPr/>
               <a:t>‹#›</a:t>
             </a:fld>
             <a:endParaRPr lang="en-US"/>
@@ -1405,7 +1418,7 @@
     </p:spTree>
     <p:extLst>
       <p:ext uri="{BB962C8B-B14F-4D97-AF65-F5344CB8AC3E}">
-        <p14:creationId xmlns:p14="http://schemas.microsoft.com/office/powerpoint/2010/main" val="2973825869"/>
+        <p14:creationId xmlns:p14="http://schemas.microsoft.com/office/powerpoint/2010/main" xmlns="" val="2973825869"/>
       </p:ext>
     </p:extLst>
   </p:cSld>
@@ -1776,7 +1789,8 @@
           <a:p>
             <a:fld id="{D2001C5A-C74B-4930-AC12-C09894D28342}" type="datetimeFigureOut">
               <a:rPr lang="en-US" smtClean="0"/>
-              <a:t>8/5/2023</a:t>
+              <a:pPr/>
+              <a:t>1/9/2024</a:t>
             </a:fld>
             <a:endParaRPr lang="en-US"/>
           </a:p>
@@ -1818,6 +1832,7 @@
           <a:p>
             <a:fld id="{5D0D9164-2450-428D-A77F-ECD64A434696}" type="slidenum">
               <a:rPr lang="en-US" smtClean="0"/>
+              <a:pPr/>
               <a:t>‹#›</a:t>
             </a:fld>
             <a:endParaRPr lang="en-US"/>
@@ -1827,7 +1842,7 @@
     </p:spTree>
     <p:extLst>
       <p:ext uri="{BB962C8B-B14F-4D97-AF65-F5344CB8AC3E}">
-        <p14:creationId xmlns:p14="http://schemas.microsoft.com/office/powerpoint/2010/main" val="1143789977"/>
+        <p14:creationId xmlns:p14="http://schemas.microsoft.com/office/powerpoint/2010/main" xmlns="" val="1143789977"/>
       </p:ext>
     </p:extLst>
   </p:cSld>
@@ -1894,7 +1909,8 @@
           <a:p>
             <a:fld id="{D2001C5A-C74B-4930-AC12-C09894D28342}" type="datetimeFigureOut">
               <a:rPr lang="en-US" smtClean="0"/>
-              <a:t>8/5/2023</a:t>
+              <a:pPr/>
+              <a:t>1/9/2024</a:t>
             </a:fld>
             <a:endParaRPr lang="en-US"/>
           </a:p>
@@ -1936,6 +1952,7 @@
           <a:p>
             <a:fld id="{5D0D9164-2450-428D-A77F-ECD64A434696}" type="slidenum">
               <a:rPr lang="en-US" smtClean="0"/>
+              <a:pPr/>
               <a:t>‹#›</a:t>
             </a:fld>
             <a:endParaRPr lang="en-US"/>
@@ -1945,7 +1962,7 @@
     </p:spTree>
     <p:extLst>
       <p:ext uri="{BB962C8B-B14F-4D97-AF65-F5344CB8AC3E}">
-        <p14:creationId xmlns:p14="http://schemas.microsoft.com/office/powerpoint/2010/main" val="2982370927"/>
+        <p14:creationId xmlns:p14="http://schemas.microsoft.com/office/powerpoint/2010/main" xmlns="" val="2982370927"/>
       </p:ext>
     </p:extLst>
   </p:cSld>
@@ -1989,7 +2006,8 @@
           <a:p>
             <a:fld id="{D2001C5A-C74B-4930-AC12-C09894D28342}" type="datetimeFigureOut">
               <a:rPr lang="en-US" smtClean="0"/>
-              <a:t>8/5/2023</a:t>
+              <a:pPr/>
+              <a:t>1/9/2024</a:t>
             </a:fld>
             <a:endParaRPr lang="en-US"/>
           </a:p>
@@ -2031,6 +2049,7 @@
           <a:p>
             <a:fld id="{5D0D9164-2450-428D-A77F-ECD64A434696}" type="slidenum">
               <a:rPr lang="en-US" smtClean="0"/>
+              <a:pPr/>
               <a:t>‹#›</a:t>
             </a:fld>
             <a:endParaRPr lang="en-US"/>
@@ -2040,7 +2059,7 @@
     </p:spTree>
     <p:extLst>
       <p:ext uri="{BB962C8B-B14F-4D97-AF65-F5344CB8AC3E}">
-        <p14:creationId xmlns:p14="http://schemas.microsoft.com/office/powerpoint/2010/main" val="1526667118"/>
+        <p14:creationId xmlns:p14="http://schemas.microsoft.com/office/powerpoint/2010/main" xmlns="" val="1526667118"/>
       </p:ext>
     </p:extLst>
   </p:cSld>
@@ -2266,7 +2285,8 @@
           <a:p>
             <a:fld id="{D2001C5A-C74B-4930-AC12-C09894D28342}" type="datetimeFigureOut">
               <a:rPr lang="en-US" smtClean="0"/>
-              <a:t>8/5/2023</a:t>
+              <a:pPr/>
+              <a:t>1/9/2024</a:t>
             </a:fld>
             <a:endParaRPr lang="en-US"/>
           </a:p>
@@ -2308,6 +2328,7 @@
           <a:p>
             <a:fld id="{5D0D9164-2450-428D-A77F-ECD64A434696}" type="slidenum">
               <a:rPr lang="en-US" smtClean="0"/>
+              <a:pPr/>
               <a:t>‹#›</a:t>
             </a:fld>
             <a:endParaRPr lang="en-US"/>
@@ -2317,7 +2338,7 @@
     </p:spTree>
     <p:extLst>
       <p:ext uri="{BB962C8B-B14F-4D97-AF65-F5344CB8AC3E}">
-        <p14:creationId xmlns:p14="http://schemas.microsoft.com/office/powerpoint/2010/main" val="1607574752"/>
+        <p14:creationId xmlns:p14="http://schemas.microsoft.com/office/powerpoint/2010/main" xmlns="" val="1607574752"/>
       </p:ext>
     </p:extLst>
   </p:cSld>
@@ -2523,7 +2544,8 @@
           <a:p>
             <a:fld id="{D2001C5A-C74B-4930-AC12-C09894D28342}" type="datetimeFigureOut">
               <a:rPr lang="en-US" smtClean="0"/>
-              <a:t>8/5/2023</a:t>
+              <a:pPr/>
+              <a:t>1/9/2024</a:t>
             </a:fld>
             <a:endParaRPr lang="en-US"/>
           </a:p>
@@ -2565,6 +2587,7 @@
           <a:p>
             <a:fld id="{5D0D9164-2450-428D-A77F-ECD64A434696}" type="slidenum">
               <a:rPr lang="en-US" smtClean="0"/>
+              <a:pPr/>
               <a:t>‹#›</a:t>
             </a:fld>
             <a:endParaRPr lang="en-US"/>
@@ -2574,7 +2597,7 @@
     </p:spTree>
     <p:extLst>
       <p:ext uri="{BB962C8B-B14F-4D97-AF65-F5344CB8AC3E}">
-        <p14:creationId xmlns:p14="http://schemas.microsoft.com/office/powerpoint/2010/main" val="1370831342"/>
+        <p14:creationId xmlns:p14="http://schemas.microsoft.com/office/powerpoint/2010/main" xmlns="" val="1370831342"/>
       </p:ext>
     </p:extLst>
   </p:cSld>
@@ -2741,7 +2764,8 @@
           <a:p>
             <a:fld id="{D2001C5A-C74B-4930-AC12-C09894D28342}" type="datetimeFigureOut">
               <a:rPr lang="en-US" smtClean="0"/>
-              <a:t>8/5/2023</a:t>
+              <a:pPr/>
+              <a:t>1/9/2024</a:t>
             </a:fld>
             <a:endParaRPr lang="en-US"/>
           </a:p>
@@ -2819,6 +2843,7 @@
           <a:p>
             <a:fld id="{5D0D9164-2450-428D-A77F-ECD64A434696}" type="slidenum">
               <a:rPr lang="en-US" smtClean="0"/>
+              <a:pPr/>
               <a:t>‹#›</a:t>
             </a:fld>
             <a:endParaRPr lang="en-US"/>
@@ -2828,7 +2853,7 @@
     </p:spTree>
     <p:extLst>
       <p:ext uri="{BB962C8B-B14F-4D97-AF65-F5344CB8AC3E}">
-        <p14:creationId xmlns:p14="http://schemas.microsoft.com/office/powerpoint/2010/main" val="1241314721"/>
+        <p14:creationId xmlns:p14="http://schemas.microsoft.com/office/powerpoint/2010/main" xmlns="" val="1241314721"/>
       </p:ext>
     </p:extLst>
   </p:cSld>
@@ -3155,27 +3180,13 @@
               </a:rPr>
               <a:t>這是天父世界</a:t>
             </a:r>
-            <a:endParaRPr lang="zh-TW" altLang="en-US" sz="7200" b="1" i="1" dirty="0">
-              <a:solidFill>
-                <a:srgbClr val="660033"/>
-              </a:solidFill>
-              <a:effectLst>
-                <a:outerShdw blurRad="38100" dist="38100" dir="2700000" algn="tl">
-                  <a:srgbClr val="000000">
-                    <a:alpha val="43137"/>
-                  </a:srgbClr>
-                </a:outerShdw>
-              </a:effectLst>
-              <a:latin typeface="微軟正黑體" pitchFamily="34" charset="-120"/>
-              <a:ea typeface="微軟正黑體" pitchFamily="34" charset="-120"/>
-            </a:endParaRPr>
           </a:p>
         </p:txBody>
       </p:sp>
     </p:spTree>
     <p:extLst>
       <p:ext uri="{BB962C8B-B14F-4D97-AF65-F5344CB8AC3E}">
-        <p14:creationId xmlns:p14="http://schemas.microsoft.com/office/powerpoint/2010/main" val="2678165257"/>
+        <p14:creationId xmlns:p14="http://schemas.microsoft.com/office/powerpoint/2010/main" xmlns="" val="2678165257"/>
       </p:ext>
     </p:extLst>
   </p:cSld>
@@ -3235,7 +3246,7 @@
                 <a:latin typeface="微軟正黑體" pitchFamily="34" charset="-120"/>
                 <a:ea typeface="微軟正黑體" pitchFamily="34" charset="-120"/>
               </a:rPr>
-              <a:t>這是天父世界</a:t>
+              <a:t>風吹之草  將祂表現</a:t>
             </a:r>
             <a:endParaRPr lang="en-US" altLang="zh-TW" sz="6400" b="1" dirty="0">
               <a:solidFill>
@@ -3257,7 +3268,7 @@
                 <a:latin typeface="微軟正黑體" pitchFamily="34" charset="-120"/>
                 <a:ea typeface="微軟正黑體" pitchFamily="34" charset="-120"/>
               </a:rPr>
-              <a:t>求主叫我不忘</a:t>
+              <a:t>天父充滿世間</a:t>
             </a:r>
             <a:endParaRPr lang="en-US" altLang="zh-TW" sz="6400" b="1" dirty="0">
               <a:solidFill>
@@ -3300,7 +3311,7 @@
                 <a:ea typeface="Microsoft JhengHei" panose="020B0604030504040204" pitchFamily="34" charset="-120"/>
                 <a:cs typeface="Arial" panose="020B0604020202020204" pitchFamily="34" charset="0"/>
               </a:rPr>
-              <a:t>( 3 / 3 )</a:t>
+              <a:t>( 2 / 3 )</a:t>
             </a:r>
             <a:endParaRPr lang="vi-VN" sz="3733" b="1" dirty="0">
               <a:solidFill>
@@ -3315,7 +3326,7 @@
     </p:spTree>
     <p:extLst>
       <p:ext uri="{BB962C8B-B14F-4D97-AF65-F5344CB8AC3E}">
-        <p14:creationId xmlns:p14="http://schemas.microsoft.com/office/powerpoint/2010/main" val="3754251505"/>
+        <p14:creationId xmlns:p14="http://schemas.microsoft.com/office/powerpoint/2010/main" xmlns="" val="1185958786"/>
       </p:ext>
     </p:extLst>
   </p:cSld>
@@ -3375,7 +3386,7 @@
                 <a:latin typeface="微軟正黑體" pitchFamily="34" charset="-120"/>
                 <a:ea typeface="微軟正黑體" pitchFamily="34" charset="-120"/>
               </a:rPr>
-              <a:t>罪惡雖然好像得勝</a:t>
+              <a:t>這是天父世界</a:t>
             </a:r>
             <a:endParaRPr lang="en-US" altLang="zh-TW" sz="6400" b="1" dirty="0">
               <a:solidFill>
@@ -3397,7 +3408,7 @@
                 <a:latin typeface="微軟正黑體" pitchFamily="34" charset="-120"/>
                 <a:ea typeface="微軟正黑體" pitchFamily="34" charset="-120"/>
               </a:rPr>
-              <a:t>天父卻仍掌管</a:t>
+              <a:t>求主叫我不忘</a:t>
             </a:r>
             <a:endParaRPr lang="en-US" altLang="zh-TW" sz="6400" b="1" dirty="0">
               <a:solidFill>
@@ -3455,7 +3466,7 @@
     </p:spTree>
     <p:extLst>
       <p:ext uri="{BB962C8B-B14F-4D97-AF65-F5344CB8AC3E}">
-        <p14:creationId xmlns:p14="http://schemas.microsoft.com/office/powerpoint/2010/main" val="3322264040"/>
+        <p14:creationId xmlns:p14="http://schemas.microsoft.com/office/powerpoint/2010/main" xmlns="" val="3754251505"/>
       </p:ext>
     </p:extLst>
   </p:cSld>
@@ -3515,7 +3526,7 @@
                 <a:latin typeface="微軟正黑體" pitchFamily="34" charset="-120"/>
                 <a:ea typeface="微軟正黑體" pitchFamily="34" charset="-120"/>
               </a:rPr>
-              <a:t>這是天父世界</a:t>
+              <a:t>罪惡雖然好像得勝</a:t>
             </a:r>
             <a:endParaRPr lang="en-US" altLang="zh-TW" sz="6400" b="1" dirty="0">
               <a:solidFill>
@@ -3537,7 +3548,7 @@
                 <a:latin typeface="微軟正黑體" pitchFamily="34" charset="-120"/>
                 <a:ea typeface="微軟正黑體" pitchFamily="34" charset="-120"/>
               </a:rPr>
-              <a:t>我心不必憂傷</a:t>
+              <a:t>天父卻仍掌管</a:t>
             </a:r>
             <a:endParaRPr lang="en-US" altLang="zh-TW" sz="6400" b="1" dirty="0">
               <a:solidFill>
@@ -3595,7 +3606,7 @@
     </p:spTree>
     <p:extLst>
       <p:ext uri="{BB962C8B-B14F-4D97-AF65-F5344CB8AC3E}">
-        <p14:creationId xmlns:p14="http://schemas.microsoft.com/office/powerpoint/2010/main" val="749836244"/>
+        <p14:creationId xmlns:p14="http://schemas.microsoft.com/office/powerpoint/2010/main" xmlns="" val="3322264040"/>
       </p:ext>
     </p:extLst>
   </p:cSld>
@@ -3655,7 +3666,7 @@
                 <a:latin typeface="微軟正黑體" pitchFamily="34" charset="-120"/>
                 <a:ea typeface="微軟正黑體" pitchFamily="34" charset="-120"/>
               </a:rPr>
-              <a:t>我主作王  天地同唱</a:t>
+              <a:t>這是天父世界</a:t>
             </a:r>
             <a:endParaRPr lang="en-US" altLang="zh-TW" sz="6400" b="1" dirty="0">
               <a:solidFill>
@@ -3677,7 +3688,7 @@
                 <a:latin typeface="微軟正黑體" pitchFamily="34" charset="-120"/>
                 <a:ea typeface="微軟正黑體" pitchFamily="34" charset="-120"/>
               </a:rPr>
-              <a:t>歌聲充滿萬方</a:t>
+              <a:t>我心不必憂傷</a:t>
             </a:r>
             <a:endParaRPr lang="en-US" altLang="zh-TW" sz="6400" b="1" dirty="0">
               <a:solidFill>
@@ -3735,7 +3746,147 @@
     </p:spTree>
     <p:extLst>
       <p:ext uri="{BB962C8B-B14F-4D97-AF65-F5344CB8AC3E}">
-        <p14:creationId xmlns:p14="http://schemas.microsoft.com/office/powerpoint/2010/main" val="2041761181"/>
+        <p14:creationId xmlns:p14="http://schemas.microsoft.com/office/powerpoint/2010/main" xmlns="" val="749836244"/>
+      </p:ext>
+    </p:extLst>
+  </p:cSld>
+  <p:clrMapOvr>
+    <a:masterClrMapping/>
+  </p:clrMapOvr>
+</p:sld>
+</file>
+
+<file path=ppt/slides/slide14.xml><?xml version="1.0" encoding="utf-8"?>
+<p:sld xmlns:a="http://schemas.openxmlformats.org/drawingml/2006/main" xmlns:r="http://schemas.openxmlformats.org/officeDocument/2006/relationships" xmlns:p="http://schemas.openxmlformats.org/presentationml/2006/main">
+  <p:cSld>
+    <p:spTree>
+      <p:nvGrpSpPr>
+        <p:cNvPr id="1" name=""/>
+        <p:cNvGrpSpPr/>
+        <p:nvPr/>
+      </p:nvGrpSpPr>
+      <p:grpSpPr>
+        <a:xfrm>
+          <a:off x="0" y="0"/>
+          <a:ext cx="0" cy="0"/>
+          <a:chOff x="0" y="0"/>
+          <a:chExt cx="0" cy="0"/>
+        </a:xfrm>
+      </p:grpSpPr>
+      <p:sp>
+        <p:nvSpPr>
+          <p:cNvPr id="5" name="內容版面配置區 4"/>
+          <p:cNvSpPr>
+            <a:spLocks noGrp="1"/>
+          </p:cNvSpPr>
+          <p:nvPr>
+            <p:ph idx="1"/>
+          </p:nvPr>
+        </p:nvSpPr>
+        <p:spPr>
+          <a:xfrm>
+            <a:off x="0" y="2084851"/>
+            <a:ext cx="12192000" cy="2404863"/>
+          </a:xfrm>
+        </p:spPr>
+        <p:txBody>
+          <a:bodyPr anchor="ctr">
+            <a:normAutofit/>
+          </a:bodyPr>
+          <a:lstStyle/>
+          <a:p>
+            <a:pPr algn="ctr">
+              <a:buNone/>
+            </a:pPr>
+            <a:r>
+              <a:rPr lang="zh-TW" altLang="en-US" sz="6400" b="1" dirty="0">
+                <a:solidFill>
+                  <a:srgbClr val="660033"/>
+                </a:solidFill>
+                <a:latin typeface="微軟正黑體" pitchFamily="34" charset="-120"/>
+                <a:ea typeface="微軟正黑體" pitchFamily="34" charset="-120"/>
+              </a:rPr>
+              <a:t>我主作王  天地同唱</a:t>
+            </a:r>
+            <a:endParaRPr lang="en-US" altLang="zh-TW" sz="6400" b="1" dirty="0">
+              <a:solidFill>
+                <a:srgbClr val="660033"/>
+              </a:solidFill>
+              <a:latin typeface="微軟正黑體" pitchFamily="34" charset="-120"/>
+              <a:ea typeface="微軟正黑體" pitchFamily="34" charset="-120"/>
+            </a:endParaRPr>
+          </a:p>
+          <a:p>
+            <a:pPr algn="ctr">
+              <a:buNone/>
+            </a:pPr>
+            <a:r>
+              <a:rPr lang="zh-TW" altLang="en-US" sz="6400" b="1" dirty="0">
+                <a:solidFill>
+                  <a:srgbClr val="660033"/>
+                </a:solidFill>
+                <a:latin typeface="微軟正黑體" pitchFamily="34" charset="-120"/>
+                <a:ea typeface="微軟正黑體" pitchFamily="34" charset="-120"/>
+              </a:rPr>
+              <a:t>歌聲充滿萬方</a:t>
+            </a:r>
+            <a:endParaRPr lang="en-US" altLang="zh-TW" sz="6400" b="1" dirty="0">
+              <a:solidFill>
+                <a:srgbClr val="660033"/>
+              </a:solidFill>
+              <a:latin typeface="微軟正黑體" pitchFamily="34" charset="-120"/>
+              <a:ea typeface="微軟正黑體" pitchFamily="34" charset="-120"/>
+            </a:endParaRPr>
+          </a:p>
+        </p:txBody>
+      </p:sp>
+      <p:sp>
+        <p:nvSpPr>
+          <p:cNvPr id="3" name="TextBox 2"/>
+          <p:cNvSpPr txBox="1"/>
+          <p:nvPr/>
+        </p:nvSpPr>
+        <p:spPr>
+          <a:xfrm>
+            <a:off x="0" y="5157192"/>
+            <a:ext cx="12192000" cy="666786"/>
+          </a:xfrm>
+          <a:prstGeom prst="rect">
+            <a:avLst/>
+          </a:prstGeom>
+          <a:noFill/>
+        </p:spPr>
+        <p:txBody>
+          <a:bodyPr wrap="square" rtlCol="0">
+            <a:spAutoFit/>
+          </a:bodyPr>
+          <a:lstStyle/>
+          <a:p>
+            <a:pPr algn="ctr"/>
+            <a:r>
+              <a:rPr lang="en-US" sz="3733" b="1" dirty="0">
+                <a:solidFill>
+                  <a:srgbClr val="660033"/>
+                </a:solidFill>
+                <a:ea typeface="Microsoft JhengHei" panose="020B0604030504040204" pitchFamily="34" charset="-120"/>
+                <a:cs typeface="Arial" panose="020B0604020202020204" pitchFamily="34" charset="0"/>
+              </a:rPr>
+              <a:t>( 3 / 3 )</a:t>
+            </a:r>
+            <a:endParaRPr lang="vi-VN" sz="3733" b="1" dirty="0">
+              <a:solidFill>
+                <a:srgbClr val="660033"/>
+              </a:solidFill>
+              <a:ea typeface="Microsoft JhengHei" panose="020B0604030504040204" pitchFamily="34" charset="-120"/>
+              <a:cs typeface="Arial" panose="020B0604020202020204" pitchFamily="34" charset="0"/>
+            </a:endParaRPr>
+          </a:p>
+        </p:txBody>
+      </p:sp>
+    </p:spTree>
+    <p:extLst>
+      <p:ext uri="{BB962C8B-B14F-4D97-AF65-F5344CB8AC3E}">
+        <p14:creationId xmlns:p14="http://schemas.microsoft.com/office/powerpoint/2010/main" xmlns="" val="2041761181"/>
       </p:ext>
     </p:extLst>
   </p:cSld>
@@ -3875,7 +4026,7 @@
     </p:spTree>
     <p:extLst>
       <p:ext uri="{BB962C8B-B14F-4D97-AF65-F5344CB8AC3E}">
-        <p14:creationId xmlns:p14="http://schemas.microsoft.com/office/powerpoint/2010/main" val="676498115"/>
+        <p14:creationId xmlns:p14="http://schemas.microsoft.com/office/powerpoint/2010/main" xmlns="" val="676498115"/>
       </p:ext>
     </p:extLst>
   </p:cSld>
@@ -4015,7 +4166,7 @@
     </p:spTree>
     <p:extLst>
       <p:ext uri="{BB962C8B-B14F-4D97-AF65-F5344CB8AC3E}">
-        <p14:creationId xmlns:p14="http://schemas.microsoft.com/office/powerpoint/2010/main" val="3472712160"/>
+        <p14:creationId xmlns:p14="http://schemas.microsoft.com/office/powerpoint/2010/main" xmlns="" val="3472712160"/>
       </p:ext>
     </p:extLst>
   </p:cSld>
@@ -4044,7 +4195,26 @@
       </p:grpSpPr>
       <p:sp>
         <p:nvSpPr>
-          <p:cNvPr id="5" name="內容版面配置區 4"/>
+          <p:cNvPr id="2" name="標題 1"/>
+          <p:cNvSpPr>
+            <a:spLocks noGrp="1"/>
+          </p:cNvSpPr>
+          <p:nvPr>
+            <p:ph type="title"/>
+          </p:nvPr>
+        </p:nvSpPr>
+        <p:spPr/>
+        <p:txBody>
+          <a:bodyPr/>
+          <a:lstStyle/>
+          <a:p>
+            <a:endParaRPr lang="zh-TW" altLang="en-US"/>
+          </a:p>
+        </p:txBody>
+      </p:sp>
+      <p:sp>
+        <p:nvSpPr>
+          <p:cNvPr id="3" name="內容版面配置區 2"/>
           <p:cNvSpPr>
             <a:spLocks noGrp="1"/>
           </p:cNvSpPr>
@@ -4052,112 +4222,16 @@
             <p:ph idx="1"/>
           </p:nvPr>
         </p:nvSpPr>
-        <p:spPr>
-          <a:xfrm>
-            <a:off x="0" y="2084851"/>
-            <a:ext cx="12192000" cy="2404863"/>
-          </a:xfrm>
-        </p:spPr>
-        <p:txBody>
-          <a:bodyPr anchor="ctr">
-            <a:normAutofit/>
-          </a:bodyPr>
-          <a:lstStyle/>
-          <a:p>
-            <a:pPr algn="ctr">
-              <a:buNone/>
-            </a:pPr>
-            <a:r>
-              <a:rPr lang="zh-TW" altLang="en-US" sz="6400" b="1" dirty="0">
-                <a:solidFill>
-                  <a:srgbClr val="660033"/>
-                </a:solidFill>
-                <a:latin typeface="微軟正黑體" pitchFamily="34" charset="-120"/>
-                <a:ea typeface="微軟正黑體" pitchFamily="34" charset="-120"/>
-              </a:rPr>
-              <a:t>這是天父世界</a:t>
-            </a:r>
-            <a:endParaRPr lang="en-US" altLang="zh-TW" sz="6400" b="1" dirty="0">
-              <a:solidFill>
-                <a:srgbClr val="660033"/>
-              </a:solidFill>
-              <a:latin typeface="微軟正黑體" pitchFamily="34" charset="-120"/>
-              <a:ea typeface="微軟正黑體" pitchFamily="34" charset="-120"/>
-            </a:endParaRPr>
-          </a:p>
-          <a:p>
-            <a:pPr algn="ctr">
-              <a:buNone/>
-            </a:pPr>
-            <a:r>
-              <a:rPr lang="zh-TW" altLang="en-US" sz="6400" b="1" dirty="0">
-                <a:solidFill>
-                  <a:srgbClr val="660033"/>
-                </a:solidFill>
-                <a:latin typeface="微軟正黑體" pitchFamily="34" charset="-120"/>
-                <a:ea typeface="微軟正黑體" pitchFamily="34" charset="-120"/>
-              </a:rPr>
-              <a:t>我心滿有安寧</a:t>
-            </a:r>
-            <a:endParaRPr lang="en-US" altLang="zh-TW" sz="6400" b="1" dirty="0">
-              <a:solidFill>
-                <a:srgbClr val="660033"/>
-              </a:solidFill>
-              <a:latin typeface="微軟正黑體" pitchFamily="34" charset="-120"/>
-              <a:ea typeface="微軟正黑體" pitchFamily="34" charset="-120"/>
-            </a:endParaRPr>
-          </a:p>
-        </p:txBody>
-      </p:sp>
-      <p:sp>
-        <p:nvSpPr>
-          <p:cNvPr id="3" name="TextBox 2"/>
-          <p:cNvSpPr txBox="1"/>
-          <p:nvPr/>
-        </p:nvSpPr>
-        <p:spPr>
-          <a:xfrm>
-            <a:off x="0" y="5157192"/>
-            <a:ext cx="12192000" cy="666786"/>
-          </a:xfrm>
-          <a:prstGeom prst="rect">
-            <a:avLst/>
-          </a:prstGeom>
-          <a:noFill/>
-        </p:spPr>
-        <p:txBody>
-          <a:bodyPr wrap="square" rtlCol="0">
-            <a:spAutoFit/>
-          </a:bodyPr>
-          <a:lstStyle/>
-          <a:p>
-            <a:pPr algn="ctr"/>
-            <a:r>
-              <a:rPr lang="en-US" sz="3733" b="1" dirty="0">
-                <a:solidFill>
-                  <a:srgbClr val="660033"/>
-                </a:solidFill>
-                <a:ea typeface="Microsoft JhengHei" panose="020B0604030504040204" pitchFamily="34" charset="-120"/>
-                <a:cs typeface="Arial" panose="020B0604020202020204" pitchFamily="34" charset="0"/>
-              </a:rPr>
-              <a:t>( 1 / 3 )</a:t>
-            </a:r>
-            <a:endParaRPr lang="vi-VN" sz="3733" b="1" dirty="0">
-              <a:solidFill>
-                <a:srgbClr val="660033"/>
-              </a:solidFill>
-              <a:ea typeface="Microsoft JhengHei" panose="020B0604030504040204" pitchFamily="34" charset="-120"/>
-              <a:cs typeface="Arial" panose="020B0604020202020204" pitchFamily="34" charset="0"/>
-            </a:endParaRPr>
+        <p:spPr/>
+        <p:txBody>
+          <a:bodyPr/>
+          <a:lstStyle/>
+          <a:p>
+            <a:endParaRPr lang="zh-TW" altLang="en-US"/>
           </a:p>
         </p:txBody>
       </p:sp>
     </p:spTree>
-    <p:extLst>
-      <p:ext uri="{BB962C8B-B14F-4D97-AF65-F5344CB8AC3E}">
-        <p14:creationId xmlns:p14="http://schemas.microsoft.com/office/powerpoint/2010/main" val="3626393868"/>
-      </p:ext>
-    </p:extLst>
   </p:cSld>
   <p:clrMapOvr>
     <a:masterClrMapping/>
@@ -4215,7 +4289,7 @@
                 <a:latin typeface="微軟正黑體" pitchFamily="34" charset="-120"/>
                 <a:ea typeface="微軟正黑體" pitchFamily="34" charset="-120"/>
               </a:rPr>
-              <a:t>樹木花草  蒼天碧海</a:t>
+              <a:t>這是天父世界</a:t>
             </a:r>
             <a:endParaRPr lang="en-US" altLang="zh-TW" sz="6400" b="1" dirty="0">
               <a:solidFill>
@@ -4237,7 +4311,7 @@
                 <a:latin typeface="微軟正黑體" pitchFamily="34" charset="-120"/>
                 <a:ea typeface="微軟正黑體" pitchFamily="34" charset="-120"/>
               </a:rPr>
-              <a:t>述說天父全能</a:t>
+              <a:t>我心滿有安寧</a:t>
             </a:r>
             <a:endParaRPr lang="en-US" altLang="zh-TW" sz="6400" b="1" dirty="0">
               <a:solidFill>
@@ -4295,7 +4369,7 @@
     </p:spTree>
     <p:extLst>
       <p:ext uri="{BB962C8B-B14F-4D97-AF65-F5344CB8AC3E}">
-        <p14:creationId xmlns:p14="http://schemas.microsoft.com/office/powerpoint/2010/main" val="4186686405"/>
+        <p14:creationId xmlns:p14="http://schemas.microsoft.com/office/powerpoint/2010/main" xmlns="" val="3626393868"/>
       </p:ext>
     </p:extLst>
   </p:cSld>
@@ -4355,7 +4429,7 @@
                 <a:latin typeface="微軟正黑體" pitchFamily="34" charset="-120"/>
                 <a:ea typeface="微軟正黑體" pitchFamily="34" charset="-120"/>
               </a:rPr>
-              <a:t>這是天父世界</a:t>
+              <a:t>樹木花草  蒼天碧海</a:t>
             </a:r>
             <a:endParaRPr lang="en-US" altLang="zh-TW" sz="6400" b="1" dirty="0">
               <a:solidFill>
@@ -4377,7 +4451,7 @@
                 <a:latin typeface="微軟正黑體" pitchFamily="34" charset="-120"/>
                 <a:ea typeface="微軟正黑體" pitchFamily="34" charset="-120"/>
               </a:rPr>
-              <a:t>小鳥展翅飛鳴</a:t>
+              <a:t>述說天父全能</a:t>
             </a:r>
             <a:endParaRPr lang="en-US" altLang="zh-TW" sz="6400" b="1" dirty="0">
               <a:solidFill>
@@ -4420,7 +4494,7 @@
                 <a:ea typeface="Microsoft JhengHei" panose="020B0604030504040204" pitchFamily="34" charset="-120"/>
                 <a:cs typeface="Arial" panose="020B0604020202020204" pitchFamily="34" charset="0"/>
               </a:rPr>
-              <a:t>( 2 / 3 )</a:t>
+              <a:t>( 1 / 3 )</a:t>
             </a:r>
             <a:endParaRPr lang="vi-VN" sz="3733" b="1" dirty="0">
               <a:solidFill>
@@ -4435,7 +4509,7 @@
     </p:spTree>
     <p:extLst>
       <p:ext uri="{BB962C8B-B14F-4D97-AF65-F5344CB8AC3E}">
-        <p14:creationId xmlns:p14="http://schemas.microsoft.com/office/powerpoint/2010/main" val="804132907"/>
+        <p14:creationId xmlns:p14="http://schemas.microsoft.com/office/powerpoint/2010/main" xmlns="" val="4186686405"/>
       </p:ext>
     </p:extLst>
   </p:cSld>
@@ -4495,7 +4569,7 @@
                 <a:latin typeface="微軟正黑體" pitchFamily="34" charset="-120"/>
                 <a:ea typeface="微軟正黑體" pitchFamily="34" charset="-120"/>
               </a:rPr>
-              <a:t>清晨明亮  好花美麗</a:t>
+              <a:t>這是天父世界</a:t>
             </a:r>
             <a:endParaRPr lang="en-US" altLang="zh-TW" sz="6400" b="1" dirty="0">
               <a:solidFill>
@@ -4517,7 +4591,7 @@
                 <a:latin typeface="微軟正黑體" pitchFamily="34" charset="-120"/>
                 <a:ea typeface="微軟正黑體" pitchFamily="34" charset="-120"/>
               </a:rPr>
-              <a:t>證明天理精深</a:t>
+              <a:t>小鳥展翅飛鳴</a:t>
             </a:r>
             <a:endParaRPr lang="en-US" altLang="zh-TW" sz="6400" b="1" dirty="0">
               <a:solidFill>
@@ -4575,7 +4649,7 @@
     </p:spTree>
     <p:extLst>
       <p:ext uri="{BB962C8B-B14F-4D97-AF65-F5344CB8AC3E}">
-        <p14:creationId xmlns:p14="http://schemas.microsoft.com/office/powerpoint/2010/main" val="4085201309"/>
+        <p14:creationId xmlns:p14="http://schemas.microsoft.com/office/powerpoint/2010/main" xmlns="" val="804132907"/>
       </p:ext>
     </p:extLst>
   </p:cSld>
@@ -4635,7 +4709,7 @@
                 <a:latin typeface="微軟正黑體" pitchFamily="34" charset="-120"/>
                 <a:ea typeface="微軟正黑體" pitchFamily="34" charset="-120"/>
               </a:rPr>
-              <a:t>這是天父世界</a:t>
+              <a:t>清晨明亮  好花美麗</a:t>
             </a:r>
             <a:endParaRPr lang="en-US" altLang="zh-TW" sz="6400" b="1" dirty="0">
               <a:solidFill>
@@ -4657,7 +4731,7 @@
                 <a:latin typeface="微軟正黑體" pitchFamily="34" charset="-120"/>
                 <a:ea typeface="微軟正黑體" pitchFamily="34" charset="-120"/>
               </a:rPr>
-              <a:t>祂愛普及萬千</a:t>
+              <a:t>證明天理精深</a:t>
             </a:r>
             <a:endParaRPr lang="en-US" altLang="zh-TW" sz="6400" b="1" dirty="0">
               <a:solidFill>
@@ -4715,7 +4789,7 @@
     </p:spTree>
     <p:extLst>
       <p:ext uri="{BB962C8B-B14F-4D97-AF65-F5344CB8AC3E}">
-        <p14:creationId xmlns:p14="http://schemas.microsoft.com/office/powerpoint/2010/main" val="3327262290"/>
+        <p14:creationId xmlns:p14="http://schemas.microsoft.com/office/powerpoint/2010/main" xmlns="" val="4085201309"/>
       </p:ext>
     </p:extLst>
   </p:cSld>
@@ -4775,7 +4849,7 @@
                 <a:latin typeface="微軟正黑體" pitchFamily="34" charset="-120"/>
                 <a:ea typeface="微軟正黑體" pitchFamily="34" charset="-120"/>
               </a:rPr>
-              <a:t>風吹之草  將祂表現</a:t>
+              <a:t>這是天父世界</a:t>
             </a:r>
             <a:endParaRPr lang="en-US" altLang="zh-TW" sz="6400" b="1" dirty="0">
               <a:solidFill>
@@ -4797,7 +4871,7 @@
                 <a:latin typeface="微軟正黑體" pitchFamily="34" charset="-120"/>
                 <a:ea typeface="微軟正黑體" pitchFamily="34" charset="-120"/>
               </a:rPr>
-              <a:t>天父充滿世間</a:t>
+              <a:t>祂愛普及萬千</a:t>
             </a:r>
             <a:endParaRPr lang="en-US" altLang="zh-TW" sz="6400" b="1" dirty="0">
               <a:solidFill>
@@ -4855,7 +4929,7 @@
     </p:spTree>
     <p:extLst>
       <p:ext uri="{BB962C8B-B14F-4D97-AF65-F5344CB8AC3E}">
-        <p14:creationId xmlns:p14="http://schemas.microsoft.com/office/powerpoint/2010/main" val="1185958786"/>
+        <p14:creationId xmlns:p14="http://schemas.microsoft.com/office/powerpoint/2010/main" xmlns="" val="3327262290"/>
       </p:ext>
     </p:extLst>
   </p:cSld>
@@ -5147,7 +5221,7 @@
   <a:extraClrSchemeLst/>
   <a:extLst>
     <a:ext uri="{05A4C25C-085E-4340-85A3-A5531E510DB2}">
-      <thm15:themeFamily xmlns:thm15="http://schemas.microsoft.com/office/thememl/2012/main" name="Theme1" id="{50C947AA-E878-4387-BE9D-589F450EFB2D}" vid="{E1718405-23E7-4778-B443-999E460CE376}"/>
+      <thm15:themeFamily xmlns:thm15="http://schemas.microsoft.com/office/thememl/2012/main" xmlns="" name="Theme1" id="{50C947AA-E878-4387-BE9D-589F450EFB2D}" vid="{E1718405-23E7-4778-B443-999E460CE376}"/>
     </a:ext>
   </a:extLst>
 </a:theme>

--- a/這是天父世界_v3.pptx
+++ b/這是天父世界_v3.pptx
@@ -8,17 +8,16 @@
     <p:sldId id="257" r:id="rId2"/>
     <p:sldId id="258" r:id="rId3"/>
     <p:sldId id="259" r:id="rId4"/>
-    <p:sldId id="270" r:id="rId5"/>
-    <p:sldId id="260" r:id="rId6"/>
-    <p:sldId id="261" r:id="rId7"/>
-    <p:sldId id="262" r:id="rId8"/>
-    <p:sldId id="263" r:id="rId9"/>
-    <p:sldId id="264" r:id="rId10"/>
-    <p:sldId id="265" r:id="rId11"/>
-    <p:sldId id="266" r:id="rId12"/>
-    <p:sldId id="267" r:id="rId13"/>
-    <p:sldId id="268" r:id="rId14"/>
-    <p:sldId id="269" r:id="rId15"/>
+    <p:sldId id="260" r:id="rId5"/>
+    <p:sldId id="261" r:id="rId6"/>
+    <p:sldId id="262" r:id="rId7"/>
+    <p:sldId id="263" r:id="rId8"/>
+    <p:sldId id="264" r:id="rId9"/>
+    <p:sldId id="265" r:id="rId10"/>
+    <p:sldId id="266" r:id="rId11"/>
+    <p:sldId id="267" r:id="rId12"/>
+    <p:sldId id="268" r:id="rId13"/>
+    <p:sldId id="269" r:id="rId14"/>
   </p:sldIdLst>
   <p:sldSz cx="12192000" cy="6858000"/>
   <p:notesSz cx="6858000" cy="9144000"/>
@@ -117,6 +116,22 @@
       </a:defRPr>
     </a:lvl9pPr>
   </p:defaultTextStyle>
+  <p:extLst>
+    <p:ext uri="{EFAFB233-063F-42B5-8137-9DF3F51BA10A}">
+      <p15:sldGuideLst xmlns:p15="http://schemas.microsoft.com/office/powerpoint/2012/main">
+        <p15:guide id="1" orient="horz" pos="2160">
+          <p15:clr>
+            <a:srgbClr val="A4A3A4"/>
+          </p15:clr>
+        </p15:guide>
+        <p15:guide id="2" pos="3840">
+          <p15:clr>
+            <a:srgbClr val="A4A3A4"/>
+          </p15:clr>
+        </p15:guide>
+      </p15:sldGuideLst>
+    </p:ext>
+  </p:extLst>
 </p:presentation>
 </file>
 
@@ -158,7 +173,7 @@
           <a:lstStyle/>
           <a:p>
             <a:r>
-              <a:rPr lang="en-US" altLang="zh-TW" smtClean="0"/>
+              <a:rPr lang="en-US" altLang="zh-TW"/>
               <a:t>Click to edit Master title style</a:t>
             </a:r>
             <a:endParaRPr lang="zh-TW" altLang="en-US"/>
@@ -277,7 +292,7 @@
           </a:lstStyle>
           <a:p>
             <a:r>
-              <a:rPr lang="en-US" altLang="zh-TW" smtClean="0"/>
+              <a:rPr lang="en-US" altLang="zh-TW"/>
               <a:t>Click to edit Master subtitle style</a:t>
             </a:r>
             <a:endParaRPr lang="zh-TW" altLang="en-US"/>
@@ -302,7 +317,7 @@
             <a:fld id="{D2001C5A-C74B-4930-AC12-C09894D28342}" type="datetimeFigureOut">
               <a:rPr lang="en-US" smtClean="0"/>
               <a:pPr/>
-              <a:t>1/9/2024</a:t>
+              <a:t>1/18/2025</a:t>
             </a:fld>
             <a:endParaRPr lang="en-US"/>
           </a:p>
@@ -354,7 +369,7 @@
     </p:spTree>
     <p:extLst>
       <p:ext uri="{BB962C8B-B14F-4D97-AF65-F5344CB8AC3E}">
-        <p14:creationId xmlns:p14="http://schemas.microsoft.com/office/powerpoint/2010/main" xmlns="" val="4192649881"/>
+        <p14:creationId xmlns:p14="http://schemas.microsoft.com/office/powerpoint/2010/main" val="4192649881"/>
       </p:ext>
     </p:extLst>
   </p:cSld>
@@ -397,7 +412,7 @@
           <a:lstStyle/>
           <a:p>
             <a:r>
-              <a:rPr lang="en-US" altLang="zh-TW" smtClean="0"/>
+              <a:rPr lang="en-US" altLang="zh-TW"/>
               <a:t>Click to edit Master title style</a:t>
             </a:r>
             <a:endParaRPr lang="zh-TW" altLang="en-US"/>
@@ -421,35 +436,35 @@
           <a:p>
             <a:pPr lvl="0"/>
             <a:r>
-              <a:rPr lang="en-US" altLang="zh-TW" smtClean="0"/>
+              <a:rPr lang="en-US" altLang="zh-TW"/>
               <a:t>Edit Master text styles</a:t>
             </a:r>
           </a:p>
           <a:p>
             <a:pPr lvl="1"/>
             <a:r>
-              <a:rPr lang="en-US" altLang="zh-TW" smtClean="0"/>
+              <a:rPr lang="en-US" altLang="zh-TW"/>
               <a:t>Second level</a:t>
             </a:r>
           </a:p>
           <a:p>
             <a:pPr lvl="2"/>
             <a:r>
-              <a:rPr lang="en-US" altLang="zh-TW" smtClean="0"/>
+              <a:rPr lang="en-US" altLang="zh-TW"/>
               <a:t>Third level</a:t>
             </a:r>
           </a:p>
           <a:p>
             <a:pPr lvl="3"/>
             <a:r>
-              <a:rPr lang="en-US" altLang="zh-TW" smtClean="0"/>
+              <a:rPr lang="en-US" altLang="zh-TW"/>
               <a:t>Fourth level</a:t>
             </a:r>
           </a:p>
           <a:p>
             <a:pPr lvl="4"/>
             <a:r>
-              <a:rPr lang="en-US" altLang="zh-TW" smtClean="0"/>
+              <a:rPr lang="en-US" altLang="zh-TW"/>
               <a:t>Fifth level</a:t>
             </a:r>
             <a:endParaRPr lang="zh-TW" altLang="en-US"/>
@@ -474,7 +489,7 @@
             <a:fld id="{D2001C5A-C74B-4930-AC12-C09894D28342}" type="datetimeFigureOut">
               <a:rPr lang="en-US" smtClean="0"/>
               <a:pPr/>
-              <a:t>1/9/2024</a:t>
+              <a:t>1/18/2025</a:t>
             </a:fld>
             <a:endParaRPr lang="en-US"/>
           </a:p>
@@ -526,7 +541,7 @@
     </p:spTree>
     <p:extLst>
       <p:ext uri="{BB962C8B-B14F-4D97-AF65-F5344CB8AC3E}">
-        <p14:creationId xmlns:p14="http://schemas.microsoft.com/office/powerpoint/2010/main" xmlns="" val="3858748747"/>
+        <p14:creationId xmlns:p14="http://schemas.microsoft.com/office/powerpoint/2010/main" val="3858748747"/>
       </p:ext>
     </p:extLst>
   </p:cSld>
@@ -574,7 +589,7 @@
           <a:lstStyle/>
           <a:p>
             <a:r>
-              <a:rPr lang="en-US" altLang="zh-TW" smtClean="0"/>
+              <a:rPr lang="en-US" altLang="zh-TW"/>
               <a:t>Click to edit Master title style</a:t>
             </a:r>
             <a:endParaRPr lang="zh-TW" altLang="en-US"/>
@@ -603,35 +618,35 @@
           <a:p>
             <a:pPr lvl="0"/>
             <a:r>
-              <a:rPr lang="en-US" altLang="zh-TW" smtClean="0"/>
+              <a:rPr lang="en-US" altLang="zh-TW"/>
               <a:t>Edit Master text styles</a:t>
             </a:r>
           </a:p>
           <a:p>
             <a:pPr lvl="1"/>
             <a:r>
-              <a:rPr lang="en-US" altLang="zh-TW" smtClean="0"/>
+              <a:rPr lang="en-US" altLang="zh-TW"/>
               <a:t>Second level</a:t>
             </a:r>
           </a:p>
           <a:p>
             <a:pPr lvl="2"/>
             <a:r>
-              <a:rPr lang="en-US" altLang="zh-TW" smtClean="0"/>
+              <a:rPr lang="en-US" altLang="zh-TW"/>
               <a:t>Third level</a:t>
             </a:r>
           </a:p>
           <a:p>
             <a:pPr lvl="3"/>
             <a:r>
-              <a:rPr lang="en-US" altLang="zh-TW" smtClean="0"/>
+              <a:rPr lang="en-US" altLang="zh-TW"/>
               <a:t>Fourth level</a:t>
             </a:r>
           </a:p>
           <a:p>
             <a:pPr lvl="4"/>
             <a:r>
-              <a:rPr lang="en-US" altLang="zh-TW" smtClean="0"/>
+              <a:rPr lang="en-US" altLang="zh-TW"/>
               <a:t>Fifth level</a:t>
             </a:r>
             <a:endParaRPr lang="zh-TW" altLang="en-US"/>
@@ -656,7 +671,7 @@
             <a:fld id="{D2001C5A-C74B-4930-AC12-C09894D28342}" type="datetimeFigureOut">
               <a:rPr lang="en-US" smtClean="0"/>
               <a:pPr/>
-              <a:t>1/9/2024</a:t>
+              <a:t>1/18/2025</a:t>
             </a:fld>
             <a:endParaRPr lang="en-US"/>
           </a:p>
@@ -708,7 +723,7 @@
     </p:spTree>
     <p:extLst>
       <p:ext uri="{BB962C8B-B14F-4D97-AF65-F5344CB8AC3E}">
-        <p14:creationId xmlns:p14="http://schemas.microsoft.com/office/powerpoint/2010/main" xmlns="" val="4069476122"/>
+        <p14:creationId xmlns:p14="http://schemas.microsoft.com/office/powerpoint/2010/main" val="4069476122"/>
       </p:ext>
     </p:extLst>
   </p:cSld>
@@ -751,7 +766,7 @@
           <a:lstStyle/>
           <a:p>
             <a:r>
-              <a:rPr lang="en-US" altLang="zh-TW" smtClean="0"/>
+              <a:rPr lang="en-US" altLang="zh-TW"/>
               <a:t>Click to edit Master title style</a:t>
             </a:r>
             <a:endParaRPr lang="zh-TW" altLang="en-US"/>
@@ -775,35 +790,35 @@
           <a:p>
             <a:pPr lvl="0"/>
             <a:r>
-              <a:rPr lang="en-US" altLang="zh-TW" smtClean="0"/>
+              <a:rPr lang="en-US" altLang="zh-TW"/>
               <a:t>Edit Master text styles</a:t>
             </a:r>
           </a:p>
           <a:p>
             <a:pPr lvl="1"/>
             <a:r>
-              <a:rPr lang="en-US" altLang="zh-TW" smtClean="0"/>
+              <a:rPr lang="en-US" altLang="zh-TW"/>
               <a:t>Second level</a:t>
             </a:r>
           </a:p>
           <a:p>
             <a:pPr lvl="2"/>
             <a:r>
-              <a:rPr lang="en-US" altLang="zh-TW" smtClean="0"/>
+              <a:rPr lang="en-US" altLang="zh-TW"/>
               <a:t>Third level</a:t>
             </a:r>
           </a:p>
           <a:p>
             <a:pPr lvl="3"/>
             <a:r>
-              <a:rPr lang="en-US" altLang="zh-TW" smtClean="0"/>
+              <a:rPr lang="en-US" altLang="zh-TW"/>
               <a:t>Fourth level</a:t>
             </a:r>
           </a:p>
           <a:p>
             <a:pPr lvl="4"/>
             <a:r>
-              <a:rPr lang="en-US" altLang="zh-TW" smtClean="0"/>
+              <a:rPr lang="en-US" altLang="zh-TW"/>
               <a:t>Fifth level</a:t>
             </a:r>
             <a:endParaRPr lang="zh-TW" altLang="en-US"/>
@@ -828,7 +843,7 @@
             <a:fld id="{D2001C5A-C74B-4930-AC12-C09894D28342}" type="datetimeFigureOut">
               <a:rPr lang="en-US" smtClean="0"/>
               <a:pPr/>
-              <a:t>1/9/2024</a:t>
+              <a:t>1/18/2025</a:t>
             </a:fld>
             <a:endParaRPr lang="en-US"/>
           </a:p>
@@ -880,7 +895,7 @@
     </p:spTree>
     <p:extLst>
       <p:ext uri="{BB962C8B-B14F-4D97-AF65-F5344CB8AC3E}">
-        <p14:creationId xmlns:p14="http://schemas.microsoft.com/office/powerpoint/2010/main" xmlns="" val="2025119923"/>
+        <p14:creationId xmlns:p14="http://schemas.microsoft.com/office/powerpoint/2010/main" val="2025119923"/>
       </p:ext>
     </p:extLst>
   </p:cSld>
@@ -932,7 +947,7 @@
           </a:lstStyle>
           <a:p>
             <a:r>
-              <a:rPr lang="en-US" altLang="zh-TW" smtClean="0"/>
+              <a:rPr lang="en-US" altLang="zh-TW"/>
               <a:t>Click to edit Master title style</a:t>
             </a:r>
             <a:endParaRPr lang="zh-TW" altLang="en-US"/>
@@ -1052,7 +1067,7 @@
           <a:p>
             <a:pPr lvl="0"/>
             <a:r>
-              <a:rPr lang="en-US" altLang="zh-TW" smtClean="0"/>
+              <a:rPr lang="en-US" altLang="zh-TW"/>
               <a:t>Edit Master text styles</a:t>
             </a:r>
           </a:p>
@@ -1076,7 +1091,7 @@
             <a:fld id="{D2001C5A-C74B-4930-AC12-C09894D28342}" type="datetimeFigureOut">
               <a:rPr lang="en-US" smtClean="0"/>
               <a:pPr/>
-              <a:t>1/9/2024</a:t>
+              <a:t>1/18/2025</a:t>
             </a:fld>
             <a:endParaRPr lang="en-US"/>
           </a:p>
@@ -1128,7 +1143,7 @@
     </p:spTree>
     <p:extLst>
       <p:ext uri="{BB962C8B-B14F-4D97-AF65-F5344CB8AC3E}">
-        <p14:creationId xmlns:p14="http://schemas.microsoft.com/office/powerpoint/2010/main" xmlns="" val="3416422035"/>
+        <p14:creationId xmlns:p14="http://schemas.microsoft.com/office/powerpoint/2010/main" val="3416422035"/>
       </p:ext>
     </p:extLst>
   </p:cSld>
@@ -1171,7 +1186,7 @@
           <a:lstStyle/>
           <a:p>
             <a:r>
-              <a:rPr lang="en-US" altLang="zh-TW" smtClean="0"/>
+              <a:rPr lang="en-US" altLang="zh-TW"/>
               <a:t>Click to edit Master title style</a:t>
             </a:r>
             <a:endParaRPr lang="zh-TW" altLang="en-US"/>
@@ -1228,35 +1243,35 @@
           <a:p>
             <a:pPr lvl="0"/>
             <a:r>
-              <a:rPr lang="en-US" altLang="zh-TW" smtClean="0"/>
+              <a:rPr lang="en-US" altLang="zh-TW"/>
               <a:t>Edit Master text styles</a:t>
             </a:r>
           </a:p>
           <a:p>
             <a:pPr lvl="1"/>
             <a:r>
-              <a:rPr lang="en-US" altLang="zh-TW" smtClean="0"/>
+              <a:rPr lang="en-US" altLang="zh-TW"/>
               <a:t>Second level</a:t>
             </a:r>
           </a:p>
           <a:p>
             <a:pPr lvl="2"/>
             <a:r>
-              <a:rPr lang="en-US" altLang="zh-TW" smtClean="0"/>
+              <a:rPr lang="en-US" altLang="zh-TW"/>
               <a:t>Third level</a:t>
             </a:r>
           </a:p>
           <a:p>
             <a:pPr lvl="3"/>
             <a:r>
-              <a:rPr lang="en-US" altLang="zh-TW" smtClean="0"/>
+              <a:rPr lang="en-US" altLang="zh-TW"/>
               <a:t>Fourth level</a:t>
             </a:r>
           </a:p>
           <a:p>
             <a:pPr lvl="4"/>
             <a:r>
-              <a:rPr lang="en-US" altLang="zh-TW" smtClean="0"/>
+              <a:rPr lang="en-US" altLang="zh-TW"/>
               <a:t>Fifth level</a:t>
             </a:r>
             <a:endParaRPr lang="zh-TW" altLang="en-US"/>
@@ -1313,35 +1328,35 @@
           <a:p>
             <a:pPr lvl="0"/>
             <a:r>
-              <a:rPr lang="en-US" altLang="zh-TW" smtClean="0"/>
+              <a:rPr lang="en-US" altLang="zh-TW"/>
               <a:t>Edit Master text styles</a:t>
             </a:r>
           </a:p>
           <a:p>
             <a:pPr lvl="1"/>
             <a:r>
-              <a:rPr lang="en-US" altLang="zh-TW" smtClean="0"/>
+              <a:rPr lang="en-US" altLang="zh-TW"/>
               <a:t>Second level</a:t>
             </a:r>
           </a:p>
           <a:p>
             <a:pPr lvl="2"/>
             <a:r>
-              <a:rPr lang="en-US" altLang="zh-TW" smtClean="0"/>
+              <a:rPr lang="en-US" altLang="zh-TW"/>
               <a:t>Third level</a:t>
             </a:r>
           </a:p>
           <a:p>
             <a:pPr lvl="3"/>
             <a:r>
-              <a:rPr lang="en-US" altLang="zh-TW" smtClean="0"/>
+              <a:rPr lang="en-US" altLang="zh-TW"/>
               <a:t>Fourth level</a:t>
             </a:r>
           </a:p>
           <a:p>
             <a:pPr lvl="4"/>
             <a:r>
-              <a:rPr lang="en-US" altLang="zh-TW" smtClean="0"/>
+              <a:rPr lang="en-US" altLang="zh-TW"/>
               <a:t>Fifth level</a:t>
             </a:r>
             <a:endParaRPr lang="zh-TW" altLang="en-US"/>
@@ -1366,7 +1381,7 @@
             <a:fld id="{D2001C5A-C74B-4930-AC12-C09894D28342}" type="datetimeFigureOut">
               <a:rPr lang="en-US" smtClean="0"/>
               <a:pPr/>
-              <a:t>1/9/2024</a:t>
+              <a:t>1/18/2025</a:t>
             </a:fld>
             <a:endParaRPr lang="en-US"/>
           </a:p>
@@ -1418,7 +1433,7 @@
     </p:spTree>
     <p:extLst>
       <p:ext uri="{BB962C8B-B14F-4D97-AF65-F5344CB8AC3E}">
-        <p14:creationId xmlns:p14="http://schemas.microsoft.com/office/powerpoint/2010/main" xmlns="" val="2973825869"/>
+        <p14:creationId xmlns:p14="http://schemas.microsoft.com/office/powerpoint/2010/main" val="2973825869"/>
       </p:ext>
     </p:extLst>
   </p:cSld>
@@ -1465,7 +1480,7 @@
           </a:lstStyle>
           <a:p>
             <a:r>
-              <a:rPr lang="en-US" altLang="zh-TW" smtClean="0"/>
+              <a:rPr lang="en-US" altLang="zh-TW"/>
               <a:t>Click to edit Master title style</a:t>
             </a:r>
             <a:endParaRPr lang="zh-TW" altLang="en-US"/>
@@ -1531,7 +1546,7 @@
           <a:p>
             <a:pPr lvl="0"/>
             <a:r>
-              <a:rPr lang="en-US" altLang="zh-TW" smtClean="0"/>
+              <a:rPr lang="en-US" altLang="zh-TW"/>
               <a:t>Edit Master text styles</a:t>
             </a:r>
           </a:p>
@@ -1587,35 +1602,35 @@
           <a:p>
             <a:pPr lvl="0"/>
             <a:r>
-              <a:rPr lang="en-US" altLang="zh-TW" smtClean="0"/>
+              <a:rPr lang="en-US" altLang="zh-TW"/>
               <a:t>Edit Master text styles</a:t>
             </a:r>
           </a:p>
           <a:p>
             <a:pPr lvl="1"/>
             <a:r>
-              <a:rPr lang="en-US" altLang="zh-TW" smtClean="0"/>
+              <a:rPr lang="en-US" altLang="zh-TW"/>
               <a:t>Second level</a:t>
             </a:r>
           </a:p>
           <a:p>
             <a:pPr lvl="2"/>
             <a:r>
-              <a:rPr lang="en-US" altLang="zh-TW" smtClean="0"/>
+              <a:rPr lang="en-US" altLang="zh-TW"/>
               <a:t>Third level</a:t>
             </a:r>
           </a:p>
           <a:p>
             <a:pPr lvl="3"/>
             <a:r>
-              <a:rPr lang="en-US" altLang="zh-TW" smtClean="0"/>
+              <a:rPr lang="en-US" altLang="zh-TW"/>
               <a:t>Fourth level</a:t>
             </a:r>
           </a:p>
           <a:p>
             <a:pPr lvl="4"/>
             <a:r>
-              <a:rPr lang="en-US" altLang="zh-TW" smtClean="0"/>
+              <a:rPr lang="en-US" altLang="zh-TW"/>
               <a:t>Fifth level</a:t>
             </a:r>
             <a:endParaRPr lang="zh-TW" altLang="en-US"/>
@@ -1681,7 +1696,7 @@
           <a:p>
             <a:pPr lvl="0"/>
             <a:r>
-              <a:rPr lang="en-US" altLang="zh-TW" smtClean="0"/>
+              <a:rPr lang="en-US" altLang="zh-TW"/>
               <a:t>Edit Master text styles</a:t>
             </a:r>
           </a:p>
@@ -1737,35 +1752,35 @@
           <a:p>
             <a:pPr lvl="0"/>
             <a:r>
-              <a:rPr lang="en-US" altLang="zh-TW" smtClean="0"/>
+              <a:rPr lang="en-US" altLang="zh-TW"/>
               <a:t>Edit Master text styles</a:t>
             </a:r>
           </a:p>
           <a:p>
             <a:pPr lvl="1"/>
             <a:r>
-              <a:rPr lang="en-US" altLang="zh-TW" smtClean="0"/>
+              <a:rPr lang="en-US" altLang="zh-TW"/>
               <a:t>Second level</a:t>
             </a:r>
           </a:p>
           <a:p>
             <a:pPr lvl="2"/>
             <a:r>
-              <a:rPr lang="en-US" altLang="zh-TW" smtClean="0"/>
+              <a:rPr lang="en-US" altLang="zh-TW"/>
               <a:t>Third level</a:t>
             </a:r>
           </a:p>
           <a:p>
             <a:pPr lvl="3"/>
             <a:r>
-              <a:rPr lang="en-US" altLang="zh-TW" smtClean="0"/>
+              <a:rPr lang="en-US" altLang="zh-TW"/>
               <a:t>Fourth level</a:t>
             </a:r>
           </a:p>
           <a:p>
             <a:pPr lvl="4"/>
             <a:r>
-              <a:rPr lang="en-US" altLang="zh-TW" smtClean="0"/>
+              <a:rPr lang="en-US" altLang="zh-TW"/>
               <a:t>Fifth level</a:t>
             </a:r>
             <a:endParaRPr lang="zh-TW" altLang="en-US"/>
@@ -1790,7 +1805,7 @@
             <a:fld id="{D2001C5A-C74B-4930-AC12-C09894D28342}" type="datetimeFigureOut">
               <a:rPr lang="en-US" smtClean="0"/>
               <a:pPr/>
-              <a:t>1/9/2024</a:t>
+              <a:t>1/18/2025</a:t>
             </a:fld>
             <a:endParaRPr lang="en-US"/>
           </a:p>
@@ -1842,7 +1857,7 @@
     </p:spTree>
     <p:extLst>
       <p:ext uri="{BB962C8B-B14F-4D97-AF65-F5344CB8AC3E}">
-        <p14:creationId xmlns:p14="http://schemas.microsoft.com/office/powerpoint/2010/main" xmlns="" val="1143789977"/>
+        <p14:creationId xmlns:p14="http://schemas.microsoft.com/office/powerpoint/2010/main" val="1143789977"/>
       </p:ext>
     </p:extLst>
   </p:cSld>
@@ -1885,7 +1900,7 @@
           <a:lstStyle/>
           <a:p>
             <a:r>
-              <a:rPr lang="en-US" altLang="zh-TW" smtClean="0"/>
+              <a:rPr lang="en-US" altLang="zh-TW"/>
               <a:t>Click to edit Master title style</a:t>
             </a:r>
             <a:endParaRPr lang="zh-TW" altLang="en-US"/>
@@ -1910,7 +1925,7 @@
             <a:fld id="{D2001C5A-C74B-4930-AC12-C09894D28342}" type="datetimeFigureOut">
               <a:rPr lang="en-US" smtClean="0"/>
               <a:pPr/>
-              <a:t>1/9/2024</a:t>
+              <a:t>1/18/2025</a:t>
             </a:fld>
             <a:endParaRPr lang="en-US"/>
           </a:p>
@@ -1962,7 +1977,7 @@
     </p:spTree>
     <p:extLst>
       <p:ext uri="{BB962C8B-B14F-4D97-AF65-F5344CB8AC3E}">
-        <p14:creationId xmlns:p14="http://schemas.microsoft.com/office/powerpoint/2010/main" xmlns="" val="2982370927"/>
+        <p14:creationId xmlns:p14="http://schemas.microsoft.com/office/powerpoint/2010/main" val="2982370927"/>
       </p:ext>
     </p:extLst>
   </p:cSld>
@@ -2007,7 +2022,7 @@
             <a:fld id="{D2001C5A-C74B-4930-AC12-C09894D28342}" type="datetimeFigureOut">
               <a:rPr lang="en-US" smtClean="0"/>
               <a:pPr/>
-              <a:t>1/9/2024</a:t>
+              <a:t>1/18/2025</a:t>
             </a:fld>
             <a:endParaRPr lang="en-US"/>
           </a:p>
@@ -2059,7 +2074,7 @@
     </p:spTree>
     <p:extLst>
       <p:ext uri="{BB962C8B-B14F-4D97-AF65-F5344CB8AC3E}">
-        <p14:creationId xmlns:p14="http://schemas.microsoft.com/office/powerpoint/2010/main" xmlns="" val="1526667118"/>
+        <p14:creationId xmlns:p14="http://schemas.microsoft.com/office/powerpoint/2010/main" val="1526667118"/>
       </p:ext>
     </p:extLst>
   </p:cSld>
@@ -2111,7 +2126,7 @@
           </a:lstStyle>
           <a:p>
             <a:r>
-              <a:rPr lang="en-US" altLang="zh-TW" smtClean="0"/>
+              <a:rPr lang="en-US" altLang="zh-TW"/>
               <a:t>Click to edit Master title style</a:t>
             </a:r>
             <a:endParaRPr lang="zh-TW" altLang="en-US"/>
@@ -2168,35 +2183,35 @@
           <a:p>
             <a:pPr lvl="0"/>
             <a:r>
-              <a:rPr lang="en-US" altLang="zh-TW" smtClean="0"/>
+              <a:rPr lang="en-US" altLang="zh-TW"/>
               <a:t>Edit Master text styles</a:t>
             </a:r>
           </a:p>
           <a:p>
             <a:pPr lvl="1"/>
             <a:r>
-              <a:rPr lang="en-US" altLang="zh-TW" smtClean="0"/>
+              <a:rPr lang="en-US" altLang="zh-TW"/>
               <a:t>Second level</a:t>
             </a:r>
           </a:p>
           <a:p>
             <a:pPr lvl="2"/>
             <a:r>
-              <a:rPr lang="en-US" altLang="zh-TW" smtClean="0"/>
+              <a:rPr lang="en-US" altLang="zh-TW"/>
               <a:t>Third level</a:t>
             </a:r>
           </a:p>
           <a:p>
             <a:pPr lvl="3"/>
             <a:r>
-              <a:rPr lang="en-US" altLang="zh-TW" smtClean="0"/>
+              <a:rPr lang="en-US" altLang="zh-TW"/>
               <a:t>Fourth level</a:t>
             </a:r>
           </a:p>
           <a:p>
             <a:pPr lvl="4"/>
             <a:r>
-              <a:rPr lang="en-US" altLang="zh-TW" smtClean="0"/>
+              <a:rPr lang="en-US" altLang="zh-TW"/>
               <a:t>Fifth level</a:t>
             </a:r>
             <a:endParaRPr lang="zh-TW" altLang="en-US"/>
@@ -2262,7 +2277,7 @@
           <a:p>
             <a:pPr lvl="0"/>
             <a:r>
-              <a:rPr lang="en-US" altLang="zh-TW" smtClean="0"/>
+              <a:rPr lang="en-US" altLang="zh-TW"/>
               <a:t>Edit Master text styles</a:t>
             </a:r>
           </a:p>
@@ -2286,7 +2301,7 @@
             <a:fld id="{D2001C5A-C74B-4930-AC12-C09894D28342}" type="datetimeFigureOut">
               <a:rPr lang="en-US" smtClean="0"/>
               <a:pPr/>
-              <a:t>1/9/2024</a:t>
+              <a:t>1/18/2025</a:t>
             </a:fld>
             <a:endParaRPr lang="en-US"/>
           </a:p>
@@ -2338,7 +2353,7 @@
     </p:spTree>
     <p:extLst>
       <p:ext uri="{BB962C8B-B14F-4D97-AF65-F5344CB8AC3E}">
-        <p14:creationId xmlns:p14="http://schemas.microsoft.com/office/powerpoint/2010/main" xmlns="" val="1607574752"/>
+        <p14:creationId xmlns:p14="http://schemas.microsoft.com/office/powerpoint/2010/main" val="1607574752"/>
       </p:ext>
     </p:extLst>
   </p:cSld>
@@ -2390,7 +2405,7 @@
           </a:lstStyle>
           <a:p>
             <a:r>
-              <a:rPr lang="en-US" altLang="zh-TW" smtClean="0"/>
+              <a:rPr lang="en-US" altLang="zh-TW"/>
               <a:t>Click to edit Master title style</a:t>
             </a:r>
             <a:endParaRPr lang="zh-TW" altLang="en-US"/>
@@ -2455,7 +2470,7 @@
           </a:lstStyle>
           <a:p>
             <a:r>
-              <a:rPr lang="en-US" altLang="zh-TW" smtClean="0"/>
+              <a:rPr lang="en-US" altLang="zh-TW"/>
               <a:t>Click icon to add picture</a:t>
             </a:r>
             <a:endParaRPr lang="zh-TW" altLang="en-US"/>
@@ -2521,7 +2536,7 @@
           <a:p>
             <a:pPr lvl="0"/>
             <a:r>
-              <a:rPr lang="en-US" altLang="zh-TW" smtClean="0"/>
+              <a:rPr lang="en-US" altLang="zh-TW"/>
               <a:t>Edit Master text styles</a:t>
             </a:r>
           </a:p>
@@ -2545,7 +2560,7 @@
             <a:fld id="{D2001C5A-C74B-4930-AC12-C09894D28342}" type="datetimeFigureOut">
               <a:rPr lang="en-US" smtClean="0"/>
               <a:pPr/>
-              <a:t>1/9/2024</a:t>
+              <a:t>1/18/2025</a:t>
             </a:fld>
             <a:endParaRPr lang="en-US"/>
           </a:p>
@@ -2597,7 +2612,7 @@
     </p:spTree>
     <p:extLst>
       <p:ext uri="{BB962C8B-B14F-4D97-AF65-F5344CB8AC3E}">
-        <p14:creationId xmlns:p14="http://schemas.microsoft.com/office/powerpoint/2010/main" xmlns="" val="1370831342"/>
+        <p14:creationId xmlns:p14="http://schemas.microsoft.com/office/powerpoint/2010/main" val="1370831342"/>
       </p:ext>
     </p:extLst>
   </p:cSld>
@@ -2660,10 +2675,9 @@
           <a:lstStyle/>
           <a:p>
             <a:r>
-              <a:rPr lang="zh-TW" altLang="en-US" smtClean="0"/>
+              <a:rPr lang="zh-TW" altLang="en-US"/>
               <a:t>按一下以編輯母片標題樣式</a:t>
             </a:r>
-            <a:endParaRPr lang="zh-TW" altLang="en-US"/>
           </a:p>
         </p:txBody>
       </p:sp>
@@ -2694,38 +2708,37 @@
           <a:p>
             <a:pPr lvl="0"/>
             <a:r>
-              <a:rPr lang="zh-TW" altLang="en-US" smtClean="0"/>
+              <a:rPr lang="zh-TW" altLang="en-US"/>
               <a:t>按一下以編輯母片文字樣式</a:t>
             </a:r>
           </a:p>
           <a:p>
             <a:pPr lvl="1"/>
             <a:r>
-              <a:rPr lang="zh-TW" altLang="en-US" smtClean="0"/>
+              <a:rPr lang="zh-TW" altLang="en-US"/>
               <a:t>第二層</a:t>
             </a:r>
           </a:p>
           <a:p>
             <a:pPr lvl="2"/>
             <a:r>
-              <a:rPr lang="zh-TW" altLang="en-US" smtClean="0"/>
+              <a:rPr lang="zh-TW" altLang="en-US"/>
               <a:t>第三層</a:t>
             </a:r>
           </a:p>
           <a:p>
             <a:pPr lvl="3"/>
             <a:r>
-              <a:rPr lang="zh-TW" altLang="en-US" smtClean="0"/>
+              <a:rPr lang="zh-TW" altLang="en-US"/>
               <a:t>第四層</a:t>
             </a:r>
           </a:p>
           <a:p>
             <a:pPr lvl="4"/>
             <a:r>
-              <a:rPr lang="zh-TW" altLang="en-US" smtClean="0"/>
+              <a:rPr lang="zh-TW" altLang="en-US"/>
               <a:t>第五層</a:t>
             </a:r>
-            <a:endParaRPr lang="zh-TW" altLang="en-US"/>
           </a:p>
         </p:txBody>
       </p:sp>
@@ -2765,7 +2778,7 @@
             <a:fld id="{D2001C5A-C74B-4930-AC12-C09894D28342}" type="datetimeFigureOut">
               <a:rPr lang="en-US" smtClean="0"/>
               <a:pPr/>
-              <a:t>1/9/2024</a:t>
+              <a:t>1/18/2025</a:t>
             </a:fld>
             <a:endParaRPr lang="en-US"/>
           </a:p>
@@ -2853,7 +2866,7 @@
     </p:spTree>
     <p:extLst>
       <p:ext uri="{BB962C8B-B14F-4D97-AF65-F5344CB8AC3E}">
-        <p14:creationId xmlns:p14="http://schemas.microsoft.com/office/powerpoint/2010/main" xmlns="" val="1241314721"/>
+        <p14:creationId xmlns:p14="http://schemas.microsoft.com/office/powerpoint/2010/main" val="1241314721"/>
       </p:ext>
     </p:extLst>
   </p:cSld>
@@ -3186,7 +3199,7 @@
     </p:spTree>
     <p:extLst>
       <p:ext uri="{BB962C8B-B14F-4D97-AF65-F5344CB8AC3E}">
-        <p14:creationId xmlns:p14="http://schemas.microsoft.com/office/powerpoint/2010/main" xmlns="" val="2678165257"/>
+        <p14:creationId xmlns:p14="http://schemas.microsoft.com/office/powerpoint/2010/main" val="2678165257"/>
       </p:ext>
     </p:extLst>
   </p:cSld>
@@ -3246,7 +3259,7 @@
                 <a:latin typeface="微軟正黑體" pitchFamily="34" charset="-120"/>
                 <a:ea typeface="微軟正黑體" pitchFamily="34" charset="-120"/>
               </a:rPr>
-              <a:t>風吹之草  將祂表現</a:t>
+              <a:t>這是天父世界</a:t>
             </a:r>
             <a:endParaRPr lang="en-US" altLang="zh-TW" sz="6400" b="1" dirty="0">
               <a:solidFill>
@@ -3268,7 +3281,7 @@
                 <a:latin typeface="微軟正黑體" pitchFamily="34" charset="-120"/>
                 <a:ea typeface="微軟正黑體" pitchFamily="34" charset="-120"/>
               </a:rPr>
-              <a:t>天父充滿世間</a:t>
+              <a:t>求主叫我不忘</a:t>
             </a:r>
             <a:endParaRPr lang="en-US" altLang="zh-TW" sz="6400" b="1" dirty="0">
               <a:solidFill>
@@ -3311,7 +3324,7 @@
                 <a:ea typeface="Microsoft JhengHei" panose="020B0604030504040204" pitchFamily="34" charset="-120"/>
                 <a:cs typeface="Arial" panose="020B0604020202020204" pitchFamily="34" charset="0"/>
               </a:rPr>
-              <a:t>( 2 / 3 )</a:t>
+              <a:t>( 3 / 3 )</a:t>
             </a:r>
             <a:endParaRPr lang="vi-VN" sz="3733" b="1" dirty="0">
               <a:solidFill>
@@ -3326,7 +3339,7 @@
     </p:spTree>
     <p:extLst>
       <p:ext uri="{BB962C8B-B14F-4D97-AF65-F5344CB8AC3E}">
-        <p14:creationId xmlns:p14="http://schemas.microsoft.com/office/powerpoint/2010/main" xmlns="" val="1185958786"/>
+        <p14:creationId xmlns:p14="http://schemas.microsoft.com/office/powerpoint/2010/main" val="3754251505"/>
       </p:ext>
     </p:extLst>
   </p:cSld>
@@ -3386,7 +3399,7 @@
                 <a:latin typeface="微軟正黑體" pitchFamily="34" charset="-120"/>
                 <a:ea typeface="微軟正黑體" pitchFamily="34" charset="-120"/>
               </a:rPr>
-              <a:t>這是天父世界</a:t>
+              <a:t>罪惡雖然好像得勝</a:t>
             </a:r>
             <a:endParaRPr lang="en-US" altLang="zh-TW" sz="6400" b="1" dirty="0">
               <a:solidFill>
@@ -3408,7 +3421,7 @@
                 <a:latin typeface="微軟正黑體" pitchFamily="34" charset="-120"/>
                 <a:ea typeface="微軟正黑體" pitchFamily="34" charset="-120"/>
               </a:rPr>
-              <a:t>求主叫我不忘</a:t>
+              <a:t>天父卻仍掌管</a:t>
             </a:r>
             <a:endParaRPr lang="en-US" altLang="zh-TW" sz="6400" b="1" dirty="0">
               <a:solidFill>
@@ -3466,7 +3479,7 @@
     </p:spTree>
     <p:extLst>
       <p:ext uri="{BB962C8B-B14F-4D97-AF65-F5344CB8AC3E}">
-        <p14:creationId xmlns:p14="http://schemas.microsoft.com/office/powerpoint/2010/main" xmlns="" val="3754251505"/>
+        <p14:creationId xmlns:p14="http://schemas.microsoft.com/office/powerpoint/2010/main" val="3322264040"/>
       </p:ext>
     </p:extLst>
   </p:cSld>
@@ -3526,7 +3539,7 @@
                 <a:latin typeface="微軟正黑體" pitchFamily="34" charset="-120"/>
                 <a:ea typeface="微軟正黑體" pitchFamily="34" charset="-120"/>
               </a:rPr>
-              <a:t>罪惡雖然好像得勝</a:t>
+              <a:t>這是天父世界</a:t>
             </a:r>
             <a:endParaRPr lang="en-US" altLang="zh-TW" sz="6400" b="1" dirty="0">
               <a:solidFill>
@@ -3548,7 +3561,7 @@
                 <a:latin typeface="微軟正黑體" pitchFamily="34" charset="-120"/>
                 <a:ea typeface="微軟正黑體" pitchFamily="34" charset="-120"/>
               </a:rPr>
-              <a:t>天父卻仍掌管</a:t>
+              <a:t>我心不必憂傷</a:t>
             </a:r>
             <a:endParaRPr lang="en-US" altLang="zh-TW" sz="6400" b="1" dirty="0">
               <a:solidFill>
@@ -3606,7 +3619,7 @@
     </p:spTree>
     <p:extLst>
       <p:ext uri="{BB962C8B-B14F-4D97-AF65-F5344CB8AC3E}">
-        <p14:creationId xmlns:p14="http://schemas.microsoft.com/office/powerpoint/2010/main" xmlns="" val="3322264040"/>
+        <p14:creationId xmlns:p14="http://schemas.microsoft.com/office/powerpoint/2010/main" val="749836244"/>
       </p:ext>
     </p:extLst>
   </p:cSld>
@@ -3666,7 +3679,7 @@
                 <a:latin typeface="微軟正黑體" pitchFamily="34" charset="-120"/>
                 <a:ea typeface="微軟正黑體" pitchFamily="34" charset="-120"/>
               </a:rPr>
-              <a:t>這是天父世界</a:t>
+              <a:t>我主作王  天地同唱</a:t>
             </a:r>
             <a:endParaRPr lang="en-US" altLang="zh-TW" sz="6400" b="1" dirty="0">
               <a:solidFill>
@@ -3688,7 +3701,7 @@
                 <a:latin typeface="微軟正黑體" pitchFamily="34" charset="-120"/>
                 <a:ea typeface="微軟正黑體" pitchFamily="34" charset="-120"/>
               </a:rPr>
-              <a:t>我心不必憂傷</a:t>
+              <a:t>歌聲充滿萬方</a:t>
             </a:r>
             <a:endParaRPr lang="en-US" altLang="zh-TW" sz="6400" b="1" dirty="0">
               <a:solidFill>
@@ -3746,147 +3759,7 @@
     </p:spTree>
     <p:extLst>
       <p:ext uri="{BB962C8B-B14F-4D97-AF65-F5344CB8AC3E}">
-        <p14:creationId xmlns:p14="http://schemas.microsoft.com/office/powerpoint/2010/main" xmlns="" val="749836244"/>
-      </p:ext>
-    </p:extLst>
-  </p:cSld>
-  <p:clrMapOvr>
-    <a:masterClrMapping/>
-  </p:clrMapOvr>
-</p:sld>
-</file>
-
-<file path=ppt/slides/slide14.xml><?xml version="1.0" encoding="utf-8"?>
-<p:sld xmlns:a="http://schemas.openxmlformats.org/drawingml/2006/main" xmlns:r="http://schemas.openxmlformats.org/officeDocument/2006/relationships" xmlns:p="http://schemas.openxmlformats.org/presentationml/2006/main">
-  <p:cSld>
-    <p:spTree>
-      <p:nvGrpSpPr>
-        <p:cNvPr id="1" name=""/>
-        <p:cNvGrpSpPr/>
-        <p:nvPr/>
-      </p:nvGrpSpPr>
-      <p:grpSpPr>
-        <a:xfrm>
-          <a:off x="0" y="0"/>
-          <a:ext cx="0" cy="0"/>
-          <a:chOff x="0" y="0"/>
-          <a:chExt cx="0" cy="0"/>
-        </a:xfrm>
-      </p:grpSpPr>
-      <p:sp>
-        <p:nvSpPr>
-          <p:cNvPr id="5" name="內容版面配置區 4"/>
-          <p:cNvSpPr>
-            <a:spLocks noGrp="1"/>
-          </p:cNvSpPr>
-          <p:nvPr>
-            <p:ph idx="1"/>
-          </p:nvPr>
-        </p:nvSpPr>
-        <p:spPr>
-          <a:xfrm>
-            <a:off x="0" y="2084851"/>
-            <a:ext cx="12192000" cy="2404863"/>
-          </a:xfrm>
-        </p:spPr>
-        <p:txBody>
-          <a:bodyPr anchor="ctr">
-            <a:normAutofit/>
-          </a:bodyPr>
-          <a:lstStyle/>
-          <a:p>
-            <a:pPr algn="ctr">
-              <a:buNone/>
-            </a:pPr>
-            <a:r>
-              <a:rPr lang="zh-TW" altLang="en-US" sz="6400" b="1" dirty="0">
-                <a:solidFill>
-                  <a:srgbClr val="660033"/>
-                </a:solidFill>
-                <a:latin typeface="微軟正黑體" pitchFamily="34" charset="-120"/>
-                <a:ea typeface="微軟正黑體" pitchFamily="34" charset="-120"/>
-              </a:rPr>
-              <a:t>我主作王  天地同唱</a:t>
-            </a:r>
-            <a:endParaRPr lang="en-US" altLang="zh-TW" sz="6400" b="1" dirty="0">
-              <a:solidFill>
-                <a:srgbClr val="660033"/>
-              </a:solidFill>
-              <a:latin typeface="微軟正黑體" pitchFamily="34" charset="-120"/>
-              <a:ea typeface="微軟正黑體" pitchFamily="34" charset="-120"/>
-            </a:endParaRPr>
-          </a:p>
-          <a:p>
-            <a:pPr algn="ctr">
-              <a:buNone/>
-            </a:pPr>
-            <a:r>
-              <a:rPr lang="zh-TW" altLang="en-US" sz="6400" b="1" dirty="0">
-                <a:solidFill>
-                  <a:srgbClr val="660033"/>
-                </a:solidFill>
-                <a:latin typeface="微軟正黑體" pitchFamily="34" charset="-120"/>
-                <a:ea typeface="微軟正黑體" pitchFamily="34" charset="-120"/>
-              </a:rPr>
-              <a:t>歌聲充滿萬方</a:t>
-            </a:r>
-            <a:endParaRPr lang="en-US" altLang="zh-TW" sz="6400" b="1" dirty="0">
-              <a:solidFill>
-                <a:srgbClr val="660033"/>
-              </a:solidFill>
-              <a:latin typeface="微軟正黑體" pitchFamily="34" charset="-120"/>
-              <a:ea typeface="微軟正黑體" pitchFamily="34" charset="-120"/>
-            </a:endParaRPr>
-          </a:p>
-        </p:txBody>
-      </p:sp>
-      <p:sp>
-        <p:nvSpPr>
-          <p:cNvPr id="3" name="TextBox 2"/>
-          <p:cNvSpPr txBox="1"/>
-          <p:nvPr/>
-        </p:nvSpPr>
-        <p:spPr>
-          <a:xfrm>
-            <a:off x="0" y="5157192"/>
-            <a:ext cx="12192000" cy="666786"/>
-          </a:xfrm>
-          <a:prstGeom prst="rect">
-            <a:avLst/>
-          </a:prstGeom>
-          <a:noFill/>
-        </p:spPr>
-        <p:txBody>
-          <a:bodyPr wrap="square" rtlCol="0">
-            <a:spAutoFit/>
-          </a:bodyPr>
-          <a:lstStyle/>
-          <a:p>
-            <a:pPr algn="ctr"/>
-            <a:r>
-              <a:rPr lang="en-US" sz="3733" b="1" dirty="0">
-                <a:solidFill>
-                  <a:srgbClr val="660033"/>
-                </a:solidFill>
-                <a:ea typeface="Microsoft JhengHei" panose="020B0604030504040204" pitchFamily="34" charset="-120"/>
-                <a:cs typeface="Arial" panose="020B0604020202020204" pitchFamily="34" charset="0"/>
-              </a:rPr>
-              <a:t>( 3 / 3 )</a:t>
-            </a:r>
-            <a:endParaRPr lang="vi-VN" sz="3733" b="1" dirty="0">
-              <a:solidFill>
-                <a:srgbClr val="660033"/>
-              </a:solidFill>
-              <a:ea typeface="Microsoft JhengHei" panose="020B0604030504040204" pitchFamily="34" charset="-120"/>
-              <a:cs typeface="Arial" panose="020B0604020202020204" pitchFamily="34" charset="0"/>
-            </a:endParaRPr>
-          </a:p>
-        </p:txBody>
-      </p:sp>
-    </p:spTree>
-    <p:extLst>
-      <p:ext uri="{BB962C8B-B14F-4D97-AF65-F5344CB8AC3E}">
-        <p14:creationId xmlns:p14="http://schemas.microsoft.com/office/powerpoint/2010/main" xmlns="" val="2041761181"/>
+        <p14:creationId xmlns:p14="http://schemas.microsoft.com/office/powerpoint/2010/main" val="2041761181"/>
       </p:ext>
     </p:extLst>
   </p:cSld>
@@ -4026,7 +3899,7 @@
     </p:spTree>
     <p:extLst>
       <p:ext uri="{BB962C8B-B14F-4D97-AF65-F5344CB8AC3E}">
-        <p14:creationId xmlns:p14="http://schemas.microsoft.com/office/powerpoint/2010/main" xmlns="" val="676498115"/>
+        <p14:creationId xmlns:p14="http://schemas.microsoft.com/office/powerpoint/2010/main" val="676498115"/>
       </p:ext>
     </p:extLst>
   </p:cSld>
@@ -4166,7 +4039,7 @@
     </p:spTree>
     <p:extLst>
       <p:ext uri="{BB962C8B-B14F-4D97-AF65-F5344CB8AC3E}">
-        <p14:creationId xmlns:p14="http://schemas.microsoft.com/office/powerpoint/2010/main" xmlns="" val="3472712160"/>
+        <p14:creationId xmlns:p14="http://schemas.microsoft.com/office/powerpoint/2010/main" val="3472712160"/>
       </p:ext>
     </p:extLst>
   </p:cSld>
@@ -4195,26 +4068,7 @@
       </p:grpSpPr>
       <p:sp>
         <p:nvSpPr>
-          <p:cNvPr id="2" name="標題 1"/>
-          <p:cNvSpPr>
-            <a:spLocks noGrp="1"/>
-          </p:cNvSpPr>
-          <p:nvPr>
-            <p:ph type="title"/>
-          </p:nvPr>
-        </p:nvSpPr>
-        <p:spPr/>
-        <p:txBody>
-          <a:bodyPr/>
-          <a:lstStyle/>
-          <a:p>
-            <a:endParaRPr lang="zh-TW" altLang="en-US"/>
-          </a:p>
-        </p:txBody>
-      </p:sp>
-      <p:sp>
-        <p:nvSpPr>
-          <p:cNvPr id="3" name="內容版面配置區 2"/>
+          <p:cNvPr id="5" name="內容版面配置區 4"/>
           <p:cNvSpPr>
             <a:spLocks noGrp="1"/>
           </p:cNvSpPr>
@@ -4222,16 +4076,112 @@
             <p:ph idx="1"/>
           </p:nvPr>
         </p:nvSpPr>
-        <p:spPr/>
-        <p:txBody>
-          <a:bodyPr/>
-          <a:lstStyle/>
-          <a:p>
-            <a:endParaRPr lang="zh-TW" altLang="en-US"/>
+        <p:spPr>
+          <a:xfrm>
+            <a:off x="0" y="2084851"/>
+            <a:ext cx="12192000" cy="2404863"/>
+          </a:xfrm>
+        </p:spPr>
+        <p:txBody>
+          <a:bodyPr anchor="ctr">
+            <a:normAutofit/>
+          </a:bodyPr>
+          <a:lstStyle/>
+          <a:p>
+            <a:pPr algn="ctr">
+              <a:buNone/>
+            </a:pPr>
+            <a:r>
+              <a:rPr lang="zh-TW" altLang="en-US" sz="6400" b="1" dirty="0">
+                <a:solidFill>
+                  <a:srgbClr val="660033"/>
+                </a:solidFill>
+                <a:latin typeface="微軟正黑體" pitchFamily="34" charset="-120"/>
+                <a:ea typeface="微軟正黑體" pitchFamily="34" charset="-120"/>
+              </a:rPr>
+              <a:t>這是天父世界</a:t>
+            </a:r>
+            <a:endParaRPr lang="en-US" altLang="zh-TW" sz="6400" b="1" dirty="0">
+              <a:solidFill>
+                <a:srgbClr val="660033"/>
+              </a:solidFill>
+              <a:latin typeface="微軟正黑體" pitchFamily="34" charset="-120"/>
+              <a:ea typeface="微軟正黑體" pitchFamily="34" charset="-120"/>
+            </a:endParaRPr>
+          </a:p>
+          <a:p>
+            <a:pPr algn="ctr">
+              <a:buNone/>
+            </a:pPr>
+            <a:r>
+              <a:rPr lang="zh-TW" altLang="en-US" sz="6400" b="1" dirty="0">
+                <a:solidFill>
+                  <a:srgbClr val="660033"/>
+                </a:solidFill>
+                <a:latin typeface="微軟正黑體" pitchFamily="34" charset="-120"/>
+                <a:ea typeface="微軟正黑體" pitchFamily="34" charset="-120"/>
+              </a:rPr>
+              <a:t>我心滿有安寧</a:t>
+            </a:r>
+            <a:endParaRPr lang="en-US" altLang="zh-TW" sz="6400" b="1" dirty="0">
+              <a:solidFill>
+                <a:srgbClr val="660033"/>
+              </a:solidFill>
+              <a:latin typeface="微軟正黑體" pitchFamily="34" charset="-120"/>
+              <a:ea typeface="微軟正黑體" pitchFamily="34" charset="-120"/>
+            </a:endParaRPr>
+          </a:p>
+        </p:txBody>
+      </p:sp>
+      <p:sp>
+        <p:nvSpPr>
+          <p:cNvPr id="3" name="TextBox 2"/>
+          <p:cNvSpPr txBox="1"/>
+          <p:nvPr/>
+        </p:nvSpPr>
+        <p:spPr>
+          <a:xfrm>
+            <a:off x="0" y="5157192"/>
+            <a:ext cx="12192000" cy="666786"/>
+          </a:xfrm>
+          <a:prstGeom prst="rect">
+            <a:avLst/>
+          </a:prstGeom>
+          <a:noFill/>
+        </p:spPr>
+        <p:txBody>
+          <a:bodyPr wrap="square" rtlCol="0">
+            <a:spAutoFit/>
+          </a:bodyPr>
+          <a:lstStyle/>
+          <a:p>
+            <a:pPr algn="ctr"/>
+            <a:r>
+              <a:rPr lang="en-US" sz="3733" b="1" dirty="0">
+                <a:solidFill>
+                  <a:srgbClr val="660033"/>
+                </a:solidFill>
+                <a:ea typeface="Microsoft JhengHei" panose="020B0604030504040204" pitchFamily="34" charset="-120"/>
+                <a:cs typeface="Arial" panose="020B0604020202020204" pitchFamily="34" charset="0"/>
+              </a:rPr>
+              <a:t>( 1 / 3 )</a:t>
+            </a:r>
+            <a:endParaRPr lang="vi-VN" sz="3733" b="1" dirty="0">
+              <a:solidFill>
+                <a:srgbClr val="660033"/>
+              </a:solidFill>
+              <a:ea typeface="Microsoft JhengHei" panose="020B0604030504040204" pitchFamily="34" charset="-120"/>
+              <a:cs typeface="Arial" panose="020B0604020202020204" pitchFamily="34" charset="0"/>
+            </a:endParaRPr>
           </a:p>
         </p:txBody>
       </p:sp>
     </p:spTree>
+    <p:extLst>
+      <p:ext uri="{BB962C8B-B14F-4D97-AF65-F5344CB8AC3E}">
+        <p14:creationId xmlns:p14="http://schemas.microsoft.com/office/powerpoint/2010/main" val="3626393868"/>
+      </p:ext>
+    </p:extLst>
   </p:cSld>
   <p:clrMapOvr>
     <a:masterClrMapping/>
@@ -4289,7 +4239,7 @@
                 <a:latin typeface="微軟正黑體" pitchFamily="34" charset="-120"/>
                 <a:ea typeface="微軟正黑體" pitchFamily="34" charset="-120"/>
               </a:rPr>
-              <a:t>這是天父世界</a:t>
+              <a:t>樹木花草  蒼天碧海</a:t>
             </a:r>
             <a:endParaRPr lang="en-US" altLang="zh-TW" sz="6400" b="1" dirty="0">
               <a:solidFill>
@@ -4311,7 +4261,7 @@
                 <a:latin typeface="微軟正黑體" pitchFamily="34" charset="-120"/>
                 <a:ea typeface="微軟正黑體" pitchFamily="34" charset="-120"/>
               </a:rPr>
-              <a:t>我心滿有安寧</a:t>
+              <a:t>述說天父全能</a:t>
             </a:r>
             <a:endParaRPr lang="en-US" altLang="zh-TW" sz="6400" b="1" dirty="0">
               <a:solidFill>
@@ -4369,7 +4319,7 @@
     </p:spTree>
     <p:extLst>
       <p:ext uri="{BB962C8B-B14F-4D97-AF65-F5344CB8AC3E}">
-        <p14:creationId xmlns:p14="http://schemas.microsoft.com/office/powerpoint/2010/main" xmlns="" val="3626393868"/>
+        <p14:creationId xmlns:p14="http://schemas.microsoft.com/office/powerpoint/2010/main" val="4186686405"/>
       </p:ext>
     </p:extLst>
   </p:cSld>
@@ -4429,7 +4379,7 @@
                 <a:latin typeface="微軟正黑體" pitchFamily="34" charset="-120"/>
                 <a:ea typeface="微軟正黑體" pitchFamily="34" charset="-120"/>
               </a:rPr>
-              <a:t>樹木花草  蒼天碧海</a:t>
+              <a:t>這是天父世界</a:t>
             </a:r>
             <a:endParaRPr lang="en-US" altLang="zh-TW" sz="6400" b="1" dirty="0">
               <a:solidFill>
@@ -4451,7 +4401,7 @@
                 <a:latin typeface="微軟正黑體" pitchFamily="34" charset="-120"/>
                 <a:ea typeface="微軟正黑體" pitchFamily="34" charset="-120"/>
               </a:rPr>
-              <a:t>述說天父全能</a:t>
+              <a:t>小鳥展翅飛鳴</a:t>
             </a:r>
             <a:endParaRPr lang="en-US" altLang="zh-TW" sz="6400" b="1" dirty="0">
               <a:solidFill>
@@ -4494,7 +4444,7 @@
                 <a:ea typeface="Microsoft JhengHei" panose="020B0604030504040204" pitchFamily="34" charset="-120"/>
                 <a:cs typeface="Arial" panose="020B0604020202020204" pitchFamily="34" charset="0"/>
               </a:rPr>
-              <a:t>( 1 / 3 )</a:t>
+              <a:t>( 2 / 3 )</a:t>
             </a:r>
             <a:endParaRPr lang="vi-VN" sz="3733" b="1" dirty="0">
               <a:solidFill>
@@ -4509,7 +4459,7 @@
     </p:spTree>
     <p:extLst>
       <p:ext uri="{BB962C8B-B14F-4D97-AF65-F5344CB8AC3E}">
-        <p14:creationId xmlns:p14="http://schemas.microsoft.com/office/powerpoint/2010/main" xmlns="" val="4186686405"/>
+        <p14:creationId xmlns:p14="http://schemas.microsoft.com/office/powerpoint/2010/main" val="804132907"/>
       </p:ext>
     </p:extLst>
   </p:cSld>
@@ -4569,7 +4519,7 @@
                 <a:latin typeface="微軟正黑體" pitchFamily="34" charset="-120"/>
                 <a:ea typeface="微軟正黑體" pitchFamily="34" charset="-120"/>
               </a:rPr>
-              <a:t>這是天父世界</a:t>
+              <a:t>清晨明亮  好花美麗</a:t>
             </a:r>
             <a:endParaRPr lang="en-US" altLang="zh-TW" sz="6400" b="1" dirty="0">
               <a:solidFill>
@@ -4591,7 +4541,7 @@
                 <a:latin typeface="微軟正黑體" pitchFamily="34" charset="-120"/>
                 <a:ea typeface="微軟正黑體" pitchFamily="34" charset="-120"/>
               </a:rPr>
-              <a:t>小鳥展翅飛鳴</a:t>
+              <a:t>證明天理精深</a:t>
             </a:r>
             <a:endParaRPr lang="en-US" altLang="zh-TW" sz="6400" b="1" dirty="0">
               <a:solidFill>
@@ -4649,7 +4599,7 @@
     </p:spTree>
     <p:extLst>
       <p:ext uri="{BB962C8B-B14F-4D97-AF65-F5344CB8AC3E}">
-        <p14:creationId xmlns:p14="http://schemas.microsoft.com/office/powerpoint/2010/main" xmlns="" val="804132907"/>
+        <p14:creationId xmlns:p14="http://schemas.microsoft.com/office/powerpoint/2010/main" val="4085201309"/>
       </p:ext>
     </p:extLst>
   </p:cSld>
@@ -4709,7 +4659,7 @@
                 <a:latin typeface="微軟正黑體" pitchFamily="34" charset="-120"/>
                 <a:ea typeface="微軟正黑體" pitchFamily="34" charset="-120"/>
               </a:rPr>
-              <a:t>清晨明亮  好花美麗</a:t>
+              <a:t>這是天父世界</a:t>
             </a:r>
             <a:endParaRPr lang="en-US" altLang="zh-TW" sz="6400" b="1" dirty="0">
               <a:solidFill>
@@ -4731,7 +4681,7 @@
                 <a:latin typeface="微軟正黑體" pitchFamily="34" charset="-120"/>
                 <a:ea typeface="微軟正黑體" pitchFamily="34" charset="-120"/>
               </a:rPr>
-              <a:t>證明天理精深</a:t>
+              <a:t>祂愛普及萬千</a:t>
             </a:r>
             <a:endParaRPr lang="en-US" altLang="zh-TW" sz="6400" b="1" dirty="0">
               <a:solidFill>
@@ -4789,7 +4739,7 @@
     </p:spTree>
     <p:extLst>
       <p:ext uri="{BB962C8B-B14F-4D97-AF65-F5344CB8AC3E}">
-        <p14:creationId xmlns:p14="http://schemas.microsoft.com/office/powerpoint/2010/main" xmlns="" val="4085201309"/>
+        <p14:creationId xmlns:p14="http://schemas.microsoft.com/office/powerpoint/2010/main" val="3327262290"/>
       </p:ext>
     </p:extLst>
   </p:cSld>
@@ -4849,7 +4799,7 @@
                 <a:latin typeface="微軟正黑體" pitchFamily="34" charset="-120"/>
                 <a:ea typeface="微軟正黑體" pitchFamily="34" charset="-120"/>
               </a:rPr>
-              <a:t>這是天父世界</a:t>
+              <a:t>風吹之草  將祂表現</a:t>
             </a:r>
             <a:endParaRPr lang="en-US" altLang="zh-TW" sz="6400" b="1" dirty="0">
               <a:solidFill>
@@ -4871,7 +4821,7 @@
                 <a:latin typeface="微軟正黑體" pitchFamily="34" charset="-120"/>
                 <a:ea typeface="微軟正黑體" pitchFamily="34" charset="-120"/>
               </a:rPr>
-              <a:t>祂愛普及萬千</a:t>
+              <a:t>天父充滿世間</a:t>
             </a:r>
             <a:endParaRPr lang="en-US" altLang="zh-TW" sz="6400" b="1" dirty="0">
               <a:solidFill>
@@ -4929,7 +4879,7 @@
     </p:spTree>
     <p:extLst>
       <p:ext uri="{BB962C8B-B14F-4D97-AF65-F5344CB8AC3E}">
-        <p14:creationId xmlns:p14="http://schemas.microsoft.com/office/powerpoint/2010/main" xmlns="" val="3327262290"/>
+        <p14:creationId xmlns:p14="http://schemas.microsoft.com/office/powerpoint/2010/main" val="1185958786"/>
       </p:ext>
     </p:extLst>
   </p:cSld>
@@ -5221,7 +5171,7 @@
   <a:extraClrSchemeLst/>
   <a:extLst>
     <a:ext uri="{05A4C25C-085E-4340-85A3-A5531E510DB2}">
-      <thm15:themeFamily xmlns:thm15="http://schemas.microsoft.com/office/thememl/2012/main" xmlns="" name="Theme1" id="{50C947AA-E878-4387-BE9D-589F450EFB2D}" vid="{E1718405-23E7-4778-B443-999E460CE376}"/>
+      <thm15:themeFamily xmlns:thm15="http://schemas.microsoft.com/office/thememl/2012/main" name="Theme1" id="{50C947AA-E878-4387-BE9D-589F450EFB2D}" vid="{E1718405-23E7-4778-B443-999E460CE376}"/>
     </a:ext>
   </a:extLst>
 </a:theme>
